--- a/宣道詩/(宣道詩250)往天行走.pptx
+++ b/宣道詩/(宣道詩250)往天行走.pptx
@@ -5,16 +5,29 @@
     <p:sldMasterId id="2147483660" r:id="rId1"/>
   </p:sldMasterIdLst>
   <p:sldIdLst>
-    <p:sldId id="256" r:id="rId2"/>
-    <p:sldId id="257" r:id="rId3"/>
-    <p:sldId id="258" r:id="rId4"/>
-    <p:sldId id="259" r:id="rId5"/>
-    <p:sldId id="260" r:id="rId6"/>
-    <p:sldId id="261" r:id="rId7"/>
-    <p:sldId id="262" r:id="rId8"/>
-    <p:sldId id="263" r:id="rId9"/>
+    <p:sldId id="393" r:id="rId2"/>
+    <p:sldId id="412" r:id="rId3"/>
+    <p:sldId id="413" r:id="rId4"/>
+    <p:sldId id="414" r:id="rId5"/>
+    <p:sldId id="415" r:id="rId6"/>
+    <p:sldId id="416" r:id="rId7"/>
+    <p:sldId id="417" r:id="rId8"/>
+    <p:sldId id="418" r:id="rId9"/>
+    <p:sldId id="419" r:id="rId10"/>
+    <p:sldId id="426" r:id="rId11"/>
+    <p:sldId id="427" r:id="rId12"/>
+    <p:sldId id="420" r:id="rId13"/>
+    <p:sldId id="421" r:id="rId14"/>
+    <p:sldId id="422" r:id="rId15"/>
+    <p:sldId id="428" r:id="rId16"/>
+    <p:sldId id="429" r:id="rId17"/>
+    <p:sldId id="423" r:id="rId18"/>
+    <p:sldId id="424" r:id="rId19"/>
+    <p:sldId id="425" r:id="rId20"/>
+    <p:sldId id="430" r:id="rId21"/>
+    <p:sldId id="431" r:id="rId22"/>
   </p:sldIdLst>
-  <p:sldSz cx="9144000" cy="6858000" type="screen4x3"/>
+  <p:sldSz cx="12192000" cy="6858000"/>
   <p:notesSz cx="6858000" cy="9144000"/>
   <p:defaultTextStyle>
     <a:defPPr>
@@ -111,6 +124,22 @@
       </a:defRPr>
     </a:lvl9pPr>
   </p:defaultTextStyle>
+  <p:extLst>
+    <p:ext uri="{EFAFB233-063F-42B5-8137-9DF3F51BA10A}">
+      <p15:sldGuideLst xmlns:p15="http://schemas.microsoft.com/office/powerpoint/2012/main">
+        <p15:guide id="1" orient="horz" pos="2160" userDrawn="1">
+          <p15:clr>
+            <a:srgbClr val="A4A3A4"/>
+          </p15:clr>
+        </p15:guide>
+        <p15:guide id="2" pos="3840" userDrawn="1">
+          <p15:clr>
+            <a:srgbClr val="A4A3A4"/>
+          </p15:clr>
+        </p15:guide>
+      </p15:sldGuideLst>
+    </p:ext>
+  </p:extLst>
 </p:presentation>
 </file>
 
@@ -143,8 +172,8 @@
         </p:nvSpPr>
         <p:spPr>
           <a:xfrm>
-            <a:off x="685800" y="2130425"/>
-            <a:ext cx="7772400" cy="1470025"/>
+            <a:off x="914400" y="2130426"/>
+            <a:ext cx="10363200" cy="1470025"/>
           </a:xfrm>
         </p:spPr>
         <p:txBody>
@@ -152,10 +181,9 @@
           <a:lstStyle/>
           <a:p>
             <a:r>
-              <a:rPr lang="zh-TW" altLang="en-US" smtClean="0"/>
+              <a:rPr lang="zh-TW" altLang="en-US"/>
               <a:t>按一下以編輯母片標題樣式</a:t>
             </a:r>
-            <a:endParaRPr lang="zh-TW" altLang="en-US"/>
           </a:p>
         </p:txBody>
       </p:sp>
@@ -171,8 +199,8 @@
         </p:nvSpPr>
         <p:spPr>
           <a:xfrm>
-            <a:off x="1371600" y="3886200"/>
-            <a:ext cx="6400800" cy="1752600"/>
+            <a:off x="1828800" y="3886200"/>
+            <a:ext cx="8534400" cy="1752600"/>
           </a:xfrm>
         </p:spPr>
         <p:txBody>
@@ -271,10 +299,9 @@
           </a:lstStyle>
           <a:p>
             <a:r>
-              <a:rPr lang="zh-TW" altLang="en-US" smtClean="0"/>
+              <a:rPr lang="zh-TW" altLang="en-US"/>
               <a:t>按一下以編輯母片副標題樣式</a:t>
             </a:r>
-            <a:endParaRPr lang="zh-TW" altLang="en-US"/>
           </a:p>
         </p:txBody>
       </p:sp>
@@ -296,7 +323,7 @@
             <a:fld id="{C655537E-FC53-4C84-BD1F-251E4CCC7059}" type="datetimeFigureOut">
               <a:rPr lang="zh-TW" altLang="en-US" smtClean="0"/>
               <a:pPr/>
-              <a:t>2017/7/23</a:t>
+              <a:t>2026/2/14</a:t>
             </a:fld>
             <a:endParaRPr lang="zh-TW" altLang="en-US"/>
           </a:p>
@@ -386,10 +413,9 @@
           <a:lstStyle/>
           <a:p>
             <a:r>
-              <a:rPr lang="zh-TW" altLang="en-US" smtClean="0"/>
+              <a:rPr lang="zh-TW" altLang="en-US"/>
               <a:t>按一下以編輯母片標題樣式</a:t>
             </a:r>
-            <a:endParaRPr lang="zh-TW" altLang="en-US"/>
           </a:p>
         </p:txBody>
       </p:sp>
@@ -410,38 +436,37 @@
           <a:p>
             <a:pPr lvl="0"/>
             <a:r>
-              <a:rPr lang="zh-TW" altLang="en-US" smtClean="0"/>
+              <a:rPr lang="zh-TW" altLang="en-US"/>
               <a:t>按一下以編輯母片文字樣式</a:t>
             </a:r>
           </a:p>
           <a:p>
             <a:pPr lvl="1"/>
             <a:r>
-              <a:rPr lang="zh-TW" altLang="en-US" smtClean="0"/>
+              <a:rPr lang="zh-TW" altLang="en-US"/>
               <a:t>第二層</a:t>
             </a:r>
           </a:p>
           <a:p>
             <a:pPr lvl="2"/>
             <a:r>
-              <a:rPr lang="zh-TW" altLang="en-US" smtClean="0"/>
+              <a:rPr lang="zh-TW" altLang="en-US"/>
               <a:t>第三層</a:t>
             </a:r>
           </a:p>
           <a:p>
             <a:pPr lvl="3"/>
             <a:r>
-              <a:rPr lang="zh-TW" altLang="en-US" smtClean="0"/>
+              <a:rPr lang="zh-TW" altLang="en-US"/>
               <a:t>第四層</a:t>
             </a:r>
           </a:p>
           <a:p>
             <a:pPr lvl="4"/>
             <a:r>
-              <a:rPr lang="zh-TW" altLang="en-US" smtClean="0"/>
+              <a:rPr lang="zh-TW" altLang="en-US"/>
               <a:t>第五層</a:t>
             </a:r>
-            <a:endParaRPr lang="zh-TW" altLang="en-US"/>
           </a:p>
         </p:txBody>
       </p:sp>
@@ -463,7 +488,7 @@
             <a:fld id="{C655537E-FC53-4C84-BD1F-251E4CCC7059}" type="datetimeFigureOut">
               <a:rPr lang="zh-TW" altLang="en-US" smtClean="0"/>
               <a:pPr/>
-              <a:t>2017/7/23</a:t>
+              <a:t>2026/2/14</a:t>
             </a:fld>
             <a:endParaRPr lang="zh-TW" altLang="en-US"/>
           </a:p>
@@ -549,8 +574,8 @@
         </p:nvSpPr>
         <p:spPr>
           <a:xfrm>
-            <a:off x="6629400" y="274638"/>
-            <a:ext cx="2057400" cy="5851525"/>
+            <a:off x="8839200" y="274639"/>
+            <a:ext cx="2743200" cy="5851525"/>
           </a:xfrm>
         </p:spPr>
         <p:txBody>
@@ -558,10 +583,9 @@
           <a:lstStyle/>
           <a:p>
             <a:r>
-              <a:rPr lang="zh-TW" altLang="en-US" smtClean="0"/>
+              <a:rPr lang="zh-TW" altLang="en-US"/>
               <a:t>按一下以編輯母片標題樣式</a:t>
             </a:r>
-            <a:endParaRPr lang="zh-TW" altLang="en-US"/>
           </a:p>
         </p:txBody>
       </p:sp>
@@ -577,8 +601,8 @@
         </p:nvSpPr>
         <p:spPr>
           <a:xfrm>
-            <a:off x="457200" y="274638"/>
-            <a:ext cx="6019800" cy="5851525"/>
+            <a:off x="609600" y="274639"/>
+            <a:ext cx="8026400" cy="5851525"/>
           </a:xfrm>
         </p:spPr>
         <p:txBody>
@@ -587,38 +611,37 @@
           <a:p>
             <a:pPr lvl="0"/>
             <a:r>
-              <a:rPr lang="zh-TW" altLang="en-US" smtClean="0"/>
+              <a:rPr lang="zh-TW" altLang="en-US"/>
               <a:t>按一下以編輯母片文字樣式</a:t>
             </a:r>
           </a:p>
           <a:p>
             <a:pPr lvl="1"/>
             <a:r>
-              <a:rPr lang="zh-TW" altLang="en-US" smtClean="0"/>
+              <a:rPr lang="zh-TW" altLang="en-US"/>
               <a:t>第二層</a:t>
             </a:r>
           </a:p>
           <a:p>
             <a:pPr lvl="2"/>
             <a:r>
-              <a:rPr lang="zh-TW" altLang="en-US" smtClean="0"/>
+              <a:rPr lang="zh-TW" altLang="en-US"/>
               <a:t>第三層</a:t>
             </a:r>
           </a:p>
           <a:p>
             <a:pPr lvl="3"/>
             <a:r>
-              <a:rPr lang="zh-TW" altLang="en-US" smtClean="0"/>
+              <a:rPr lang="zh-TW" altLang="en-US"/>
               <a:t>第四層</a:t>
             </a:r>
           </a:p>
           <a:p>
             <a:pPr lvl="4"/>
             <a:r>
-              <a:rPr lang="zh-TW" altLang="en-US" smtClean="0"/>
+              <a:rPr lang="zh-TW" altLang="en-US"/>
               <a:t>第五層</a:t>
             </a:r>
-            <a:endParaRPr lang="zh-TW" altLang="en-US"/>
           </a:p>
         </p:txBody>
       </p:sp>
@@ -640,7 +663,7 @@
             <a:fld id="{C655537E-FC53-4C84-BD1F-251E4CCC7059}" type="datetimeFigureOut">
               <a:rPr lang="zh-TW" altLang="en-US" smtClean="0"/>
               <a:pPr/>
-              <a:t>2017/7/23</a:t>
+              <a:t>2026/2/14</a:t>
             </a:fld>
             <a:endParaRPr lang="zh-TW" altLang="en-US"/>
           </a:p>
@@ -730,10 +753,9 @@
           <a:lstStyle/>
           <a:p>
             <a:r>
-              <a:rPr lang="zh-TW" altLang="en-US" smtClean="0"/>
+              <a:rPr lang="zh-TW" altLang="en-US"/>
               <a:t>按一下以編輯母片標題樣式</a:t>
             </a:r>
-            <a:endParaRPr lang="zh-TW" altLang="en-US"/>
           </a:p>
         </p:txBody>
       </p:sp>
@@ -754,38 +776,37 @@
           <a:p>
             <a:pPr lvl="0"/>
             <a:r>
-              <a:rPr lang="zh-TW" altLang="en-US" smtClean="0"/>
+              <a:rPr lang="zh-TW" altLang="en-US"/>
               <a:t>按一下以編輯母片文字樣式</a:t>
             </a:r>
           </a:p>
           <a:p>
             <a:pPr lvl="1"/>
             <a:r>
-              <a:rPr lang="zh-TW" altLang="en-US" smtClean="0"/>
+              <a:rPr lang="zh-TW" altLang="en-US"/>
               <a:t>第二層</a:t>
             </a:r>
           </a:p>
           <a:p>
             <a:pPr lvl="2"/>
             <a:r>
-              <a:rPr lang="zh-TW" altLang="en-US" smtClean="0"/>
+              <a:rPr lang="zh-TW" altLang="en-US"/>
               <a:t>第三層</a:t>
             </a:r>
           </a:p>
           <a:p>
             <a:pPr lvl="3"/>
             <a:r>
-              <a:rPr lang="zh-TW" altLang="en-US" smtClean="0"/>
+              <a:rPr lang="zh-TW" altLang="en-US"/>
               <a:t>第四層</a:t>
             </a:r>
           </a:p>
           <a:p>
             <a:pPr lvl="4"/>
             <a:r>
-              <a:rPr lang="zh-TW" altLang="en-US" smtClean="0"/>
+              <a:rPr lang="zh-TW" altLang="en-US"/>
               <a:t>第五層</a:t>
             </a:r>
-            <a:endParaRPr lang="zh-TW" altLang="en-US"/>
           </a:p>
         </p:txBody>
       </p:sp>
@@ -807,7 +828,7 @@
             <a:fld id="{C655537E-FC53-4C84-BD1F-251E4CCC7059}" type="datetimeFigureOut">
               <a:rPr lang="zh-TW" altLang="en-US" smtClean="0"/>
               <a:pPr/>
-              <a:t>2017/7/23</a:t>
+              <a:t>2026/2/14</a:t>
             </a:fld>
             <a:endParaRPr lang="zh-TW" altLang="en-US"/>
           </a:p>
@@ -893,8 +914,8 @@
         </p:nvSpPr>
         <p:spPr>
           <a:xfrm>
-            <a:off x="722313" y="4406900"/>
-            <a:ext cx="7772400" cy="1362075"/>
+            <a:off x="963084" y="4406901"/>
+            <a:ext cx="10363200" cy="1362075"/>
           </a:xfrm>
         </p:spPr>
         <p:txBody>
@@ -906,10 +927,9 @@
           </a:lstStyle>
           <a:p>
             <a:r>
-              <a:rPr lang="zh-TW" altLang="en-US" smtClean="0"/>
+              <a:rPr lang="zh-TW" altLang="en-US"/>
               <a:t>按一下以編輯母片標題樣式</a:t>
             </a:r>
-            <a:endParaRPr lang="zh-TW" altLang="en-US"/>
           </a:p>
         </p:txBody>
       </p:sp>
@@ -925,8 +945,8 @@
         </p:nvSpPr>
         <p:spPr>
           <a:xfrm>
-            <a:off x="722313" y="2906713"/>
-            <a:ext cx="7772400" cy="1500187"/>
+            <a:off x="963084" y="2906713"/>
+            <a:ext cx="10363200" cy="1500187"/>
           </a:xfrm>
         </p:spPr>
         <p:txBody>
@@ -1026,7 +1046,7 @@
           <a:p>
             <a:pPr lvl="0"/>
             <a:r>
-              <a:rPr lang="zh-TW" altLang="en-US" smtClean="0"/>
+              <a:rPr lang="zh-TW" altLang="en-US"/>
               <a:t>按一下以編輯母片文字樣式</a:t>
             </a:r>
           </a:p>
@@ -1050,7 +1070,7 @@
             <a:fld id="{C655537E-FC53-4C84-BD1F-251E4CCC7059}" type="datetimeFigureOut">
               <a:rPr lang="zh-TW" altLang="en-US" smtClean="0"/>
               <a:pPr/>
-              <a:t>2017/7/23</a:t>
+              <a:t>2026/2/14</a:t>
             </a:fld>
             <a:endParaRPr lang="zh-TW" altLang="en-US"/>
           </a:p>
@@ -1140,10 +1160,9 @@
           <a:lstStyle/>
           <a:p>
             <a:r>
-              <a:rPr lang="zh-TW" altLang="en-US" smtClean="0"/>
+              <a:rPr lang="zh-TW" altLang="en-US"/>
               <a:t>按一下以編輯母片標題樣式</a:t>
             </a:r>
-            <a:endParaRPr lang="zh-TW" altLang="en-US"/>
           </a:p>
         </p:txBody>
       </p:sp>
@@ -1159,8 +1178,8 @@
         </p:nvSpPr>
         <p:spPr>
           <a:xfrm>
-            <a:off x="457200" y="1600200"/>
-            <a:ext cx="4038600" cy="4525963"/>
+            <a:off x="609600" y="1600201"/>
+            <a:ext cx="5384800" cy="4525963"/>
           </a:xfrm>
         </p:spPr>
         <p:txBody>
@@ -1197,38 +1216,37 @@
           <a:p>
             <a:pPr lvl="0"/>
             <a:r>
-              <a:rPr lang="zh-TW" altLang="en-US" smtClean="0"/>
+              <a:rPr lang="zh-TW" altLang="en-US"/>
               <a:t>按一下以編輯母片文字樣式</a:t>
             </a:r>
           </a:p>
           <a:p>
             <a:pPr lvl="1"/>
             <a:r>
-              <a:rPr lang="zh-TW" altLang="en-US" smtClean="0"/>
+              <a:rPr lang="zh-TW" altLang="en-US"/>
               <a:t>第二層</a:t>
             </a:r>
           </a:p>
           <a:p>
             <a:pPr lvl="2"/>
             <a:r>
-              <a:rPr lang="zh-TW" altLang="en-US" smtClean="0"/>
+              <a:rPr lang="zh-TW" altLang="en-US"/>
               <a:t>第三層</a:t>
             </a:r>
           </a:p>
           <a:p>
             <a:pPr lvl="3"/>
             <a:r>
-              <a:rPr lang="zh-TW" altLang="en-US" smtClean="0"/>
+              <a:rPr lang="zh-TW" altLang="en-US"/>
               <a:t>第四層</a:t>
             </a:r>
           </a:p>
           <a:p>
             <a:pPr lvl="4"/>
             <a:r>
-              <a:rPr lang="zh-TW" altLang="en-US" smtClean="0"/>
+              <a:rPr lang="zh-TW" altLang="en-US"/>
               <a:t>第五層</a:t>
             </a:r>
-            <a:endParaRPr lang="zh-TW" altLang="en-US"/>
           </a:p>
         </p:txBody>
       </p:sp>
@@ -1244,8 +1262,8 @@
         </p:nvSpPr>
         <p:spPr>
           <a:xfrm>
-            <a:off x="4648200" y="1600200"/>
-            <a:ext cx="4038600" cy="4525963"/>
+            <a:off x="6197600" y="1600201"/>
+            <a:ext cx="5384800" cy="4525963"/>
           </a:xfrm>
         </p:spPr>
         <p:txBody>
@@ -1282,38 +1300,37 @@
           <a:p>
             <a:pPr lvl="0"/>
             <a:r>
-              <a:rPr lang="zh-TW" altLang="en-US" smtClean="0"/>
+              <a:rPr lang="zh-TW" altLang="en-US"/>
               <a:t>按一下以編輯母片文字樣式</a:t>
             </a:r>
           </a:p>
           <a:p>
             <a:pPr lvl="1"/>
             <a:r>
-              <a:rPr lang="zh-TW" altLang="en-US" smtClean="0"/>
+              <a:rPr lang="zh-TW" altLang="en-US"/>
               <a:t>第二層</a:t>
             </a:r>
           </a:p>
           <a:p>
             <a:pPr lvl="2"/>
             <a:r>
-              <a:rPr lang="zh-TW" altLang="en-US" smtClean="0"/>
+              <a:rPr lang="zh-TW" altLang="en-US"/>
               <a:t>第三層</a:t>
             </a:r>
           </a:p>
           <a:p>
             <a:pPr lvl="3"/>
             <a:r>
-              <a:rPr lang="zh-TW" altLang="en-US" smtClean="0"/>
+              <a:rPr lang="zh-TW" altLang="en-US"/>
               <a:t>第四層</a:t>
             </a:r>
           </a:p>
           <a:p>
             <a:pPr lvl="4"/>
             <a:r>
-              <a:rPr lang="zh-TW" altLang="en-US" smtClean="0"/>
+              <a:rPr lang="zh-TW" altLang="en-US"/>
               <a:t>第五層</a:t>
             </a:r>
-            <a:endParaRPr lang="zh-TW" altLang="en-US"/>
           </a:p>
         </p:txBody>
       </p:sp>
@@ -1335,7 +1352,7 @@
             <a:fld id="{C655537E-FC53-4C84-BD1F-251E4CCC7059}" type="datetimeFigureOut">
               <a:rPr lang="zh-TW" altLang="en-US" smtClean="0"/>
               <a:pPr/>
-              <a:t>2017/7/23</a:t>
+              <a:t>2026/2/14</a:t>
             </a:fld>
             <a:endParaRPr lang="zh-TW" altLang="en-US"/>
           </a:p>
@@ -1429,10 +1446,9 @@
           </a:lstStyle>
           <a:p>
             <a:r>
-              <a:rPr lang="zh-TW" altLang="en-US" smtClean="0"/>
+              <a:rPr lang="zh-TW" altLang="en-US"/>
               <a:t>按一下以編輯母片標題樣式</a:t>
             </a:r>
-            <a:endParaRPr lang="zh-TW" altLang="en-US"/>
           </a:p>
         </p:txBody>
       </p:sp>
@@ -1448,8 +1464,8 @@
         </p:nvSpPr>
         <p:spPr>
           <a:xfrm>
-            <a:off x="457200" y="1535113"/>
-            <a:ext cx="4040188" cy="639762"/>
+            <a:off x="609600" y="1535113"/>
+            <a:ext cx="5386917" cy="639762"/>
           </a:xfrm>
         </p:spPr>
         <p:txBody>
@@ -1495,7 +1511,7 @@
           <a:p>
             <a:pPr lvl="0"/>
             <a:r>
-              <a:rPr lang="zh-TW" altLang="en-US" smtClean="0"/>
+              <a:rPr lang="zh-TW" altLang="en-US"/>
               <a:t>按一下以編輯母片文字樣式</a:t>
             </a:r>
           </a:p>
@@ -1513,8 +1529,8 @@
         </p:nvSpPr>
         <p:spPr>
           <a:xfrm>
-            <a:off x="457200" y="2174875"/>
-            <a:ext cx="4040188" cy="3951288"/>
+            <a:off x="609600" y="2174875"/>
+            <a:ext cx="5386917" cy="3951288"/>
           </a:xfrm>
         </p:spPr>
         <p:txBody>
@@ -1551,38 +1567,37 @@
           <a:p>
             <a:pPr lvl="0"/>
             <a:r>
-              <a:rPr lang="zh-TW" altLang="en-US" smtClean="0"/>
+              <a:rPr lang="zh-TW" altLang="en-US"/>
               <a:t>按一下以編輯母片文字樣式</a:t>
             </a:r>
           </a:p>
           <a:p>
             <a:pPr lvl="1"/>
             <a:r>
-              <a:rPr lang="zh-TW" altLang="en-US" smtClean="0"/>
+              <a:rPr lang="zh-TW" altLang="en-US"/>
               <a:t>第二層</a:t>
             </a:r>
           </a:p>
           <a:p>
             <a:pPr lvl="2"/>
             <a:r>
-              <a:rPr lang="zh-TW" altLang="en-US" smtClean="0"/>
+              <a:rPr lang="zh-TW" altLang="en-US"/>
               <a:t>第三層</a:t>
             </a:r>
           </a:p>
           <a:p>
             <a:pPr lvl="3"/>
             <a:r>
-              <a:rPr lang="zh-TW" altLang="en-US" smtClean="0"/>
+              <a:rPr lang="zh-TW" altLang="en-US"/>
               <a:t>第四層</a:t>
             </a:r>
           </a:p>
           <a:p>
             <a:pPr lvl="4"/>
             <a:r>
-              <a:rPr lang="zh-TW" altLang="en-US" smtClean="0"/>
+              <a:rPr lang="zh-TW" altLang="en-US"/>
               <a:t>第五層</a:t>
             </a:r>
-            <a:endParaRPr lang="zh-TW" altLang="en-US"/>
           </a:p>
         </p:txBody>
       </p:sp>
@@ -1598,8 +1613,8 @@
         </p:nvSpPr>
         <p:spPr>
           <a:xfrm>
-            <a:off x="4645025" y="1535113"/>
-            <a:ext cx="4041775" cy="639762"/>
+            <a:off x="6193368" y="1535113"/>
+            <a:ext cx="5389033" cy="639762"/>
           </a:xfrm>
         </p:spPr>
         <p:txBody>
@@ -1645,7 +1660,7 @@
           <a:p>
             <a:pPr lvl="0"/>
             <a:r>
-              <a:rPr lang="zh-TW" altLang="en-US" smtClean="0"/>
+              <a:rPr lang="zh-TW" altLang="en-US"/>
               <a:t>按一下以編輯母片文字樣式</a:t>
             </a:r>
           </a:p>
@@ -1663,8 +1678,8 @@
         </p:nvSpPr>
         <p:spPr>
           <a:xfrm>
-            <a:off x="4645025" y="2174875"/>
-            <a:ext cx="4041775" cy="3951288"/>
+            <a:off x="6193368" y="2174875"/>
+            <a:ext cx="5389033" cy="3951288"/>
           </a:xfrm>
         </p:spPr>
         <p:txBody>
@@ -1701,38 +1716,37 @@
           <a:p>
             <a:pPr lvl="0"/>
             <a:r>
-              <a:rPr lang="zh-TW" altLang="en-US" smtClean="0"/>
+              <a:rPr lang="zh-TW" altLang="en-US"/>
               <a:t>按一下以編輯母片文字樣式</a:t>
             </a:r>
           </a:p>
           <a:p>
             <a:pPr lvl="1"/>
             <a:r>
-              <a:rPr lang="zh-TW" altLang="en-US" smtClean="0"/>
+              <a:rPr lang="zh-TW" altLang="en-US"/>
               <a:t>第二層</a:t>
             </a:r>
           </a:p>
           <a:p>
             <a:pPr lvl="2"/>
             <a:r>
-              <a:rPr lang="zh-TW" altLang="en-US" smtClean="0"/>
+              <a:rPr lang="zh-TW" altLang="en-US"/>
               <a:t>第三層</a:t>
             </a:r>
           </a:p>
           <a:p>
             <a:pPr lvl="3"/>
             <a:r>
-              <a:rPr lang="zh-TW" altLang="en-US" smtClean="0"/>
+              <a:rPr lang="zh-TW" altLang="en-US"/>
               <a:t>第四層</a:t>
             </a:r>
           </a:p>
           <a:p>
             <a:pPr lvl="4"/>
             <a:r>
-              <a:rPr lang="zh-TW" altLang="en-US" smtClean="0"/>
+              <a:rPr lang="zh-TW" altLang="en-US"/>
               <a:t>第五層</a:t>
             </a:r>
-            <a:endParaRPr lang="zh-TW" altLang="en-US"/>
           </a:p>
         </p:txBody>
       </p:sp>
@@ -1754,7 +1768,7 @@
             <a:fld id="{C655537E-FC53-4C84-BD1F-251E4CCC7059}" type="datetimeFigureOut">
               <a:rPr lang="zh-TW" altLang="en-US" smtClean="0"/>
               <a:pPr/>
-              <a:t>2017/7/23</a:t>
+              <a:t>2026/2/14</a:t>
             </a:fld>
             <a:endParaRPr lang="zh-TW" altLang="en-US"/>
           </a:p>
@@ -1844,10 +1858,9 @@
           <a:lstStyle/>
           <a:p>
             <a:r>
-              <a:rPr lang="zh-TW" altLang="en-US" smtClean="0"/>
+              <a:rPr lang="zh-TW" altLang="en-US"/>
               <a:t>按一下以編輯母片標題樣式</a:t>
             </a:r>
-            <a:endParaRPr lang="zh-TW" altLang="en-US"/>
           </a:p>
         </p:txBody>
       </p:sp>
@@ -1869,7 +1882,7 @@
             <a:fld id="{C655537E-FC53-4C84-BD1F-251E4CCC7059}" type="datetimeFigureOut">
               <a:rPr lang="zh-TW" altLang="en-US" smtClean="0"/>
               <a:pPr/>
-              <a:t>2017/7/23</a:t>
+              <a:t>2026/2/14</a:t>
             </a:fld>
             <a:endParaRPr lang="zh-TW" altLang="en-US"/>
           </a:p>
@@ -1961,7 +1974,7 @@
             <a:fld id="{C655537E-FC53-4C84-BD1F-251E4CCC7059}" type="datetimeFigureOut">
               <a:rPr lang="zh-TW" altLang="en-US" smtClean="0"/>
               <a:pPr/>
-              <a:t>2017/7/23</a:t>
+              <a:t>2026/2/14</a:t>
             </a:fld>
             <a:endParaRPr lang="zh-TW" altLang="en-US"/>
           </a:p>
@@ -2047,8 +2060,8 @@
         </p:nvSpPr>
         <p:spPr>
           <a:xfrm>
-            <a:off x="457200" y="273050"/>
-            <a:ext cx="3008313" cy="1162050"/>
+            <a:off x="609601" y="273050"/>
+            <a:ext cx="4011084" cy="1162050"/>
           </a:xfrm>
         </p:spPr>
         <p:txBody>
@@ -2060,10 +2073,9 @@
           </a:lstStyle>
           <a:p>
             <a:r>
-              <a:rPr lang="zh-TW" altLang="en-US" smtClean="0"/>
+              <a:rPr lang="zh-TW" altLang="en-US"/>
               <a:t>按一下以編輯母片標題樣式</a:t>
             </a:r>
-            <a:endParaRPr lang="zh-TW" altLang="en-US"/>
           </a:p>
         </p:txBody>
       </p:sp>
@@ -2079,8 +2091,8 @@
         </p:nvSpPr>
         <p:spPr>
           <a:xfrm>
-            <a:off x="3575050" y="273050"/>
-            <a:ext cx="5111750" cy="5853113"/>
+            <a:off x="4766733" y="273051"/>
+            <a:ext cx="6815667" cy="5853113"/>
           </a:xfrm>
         </p:spPr>
         <p:txBody>
@@ -2117,38 +2129,37 @@
           <a:p>
             <a:pPr lvl="0"/>
             <a:r>
-              <a:rPr lang="zh-TW" altLang="en-US" smtClean="0"/>
+              <a:rPr lang="zh-TW" altLang="en-US"/>
               <a:t>按一下以編輯母片文字樣式</a:t>
             </a:r>
           </a:p>
           <a:p>
             <a:pPr lvl="1"/>
             <a:r>
-              <a:rPr lang="zh-TW" altLang="en-US" smtClean="0"/>
+              <a:rPr lang="zh-TW" altLang="en-US"/>
               <a:t>第二層</a:t>
             </a:r>
           </a:p>
           <a:p>
             <a:pPr lvl="2"/>
             <a:r>
-              <a:rPr lang="zh-TW" altLang="en-US" smtClean="0"/>
+              <a:rPr lang="zh-TW" altLang="en-US"/>
               <a:t>第三層</a:t>
             </a:r>
           </a:p>
           <a:p>
             <a:pPr lvl="3"/>
             <a:r>
-              <a:rPr lang="zh-TW" altLang="en-US" smtClean="0"/>
+              <a:rPr lang="zh-TW" altLang="en-US"/>
               <a:t>第四層</a:t>
             </a:r>
           </a:p>
           <a:p>
             <a:pPr lvl="4"/>
             <a:r>
-              <a:rPr lang="zh-TW" altLang="en-US" smtClean="0"/>
+              <a:rPr lang="zh-TW" altLang="en-US"/>
               <a:t>第五層</a:t>
             </a:r>
-            <a:endParaRPr lang="zh-TW" altLang="en-US"/>
           </a:p>
         </p:txBody>
       </p:sp>
@@ -2164,8 +2175,8 @@
         </p:nvSpPr>
         <p:spPr>
           <a:xfrm>
-            <a:off x="457200" y="1435100"/>
-            <a:ext cx="3008313" cy="4691063"/>
+            <a:off x="609601" y="1435101"/>
+            <a:ext cx="4011084" cy="4691063"/>
           </a:xfrm>
         </p:spPr>
         <p:txBody>
@@ -2211,7 +2222,7 @@
           <a:p>
             <a:pPr lvl="0"/>
             <a:r>
-              <a:rPr lang="zh-TW" altLang="en-US" smtClean="0"/>
+              <a:rPr lang="zh-TW" altLang="en-US"/>
               <a:t>按一下以編輯母片文字樣式</a:t>
             </a:r>
           </a:p>
@@ -2235,7 +2246,7 @@
             <a:fld id="{C655537E-FC53-4C84-BD1F-251E4CCC7059}" type="datetimeFigureOut">
               <a:rPr lang="zh-TW" altLang="en-US" smtClean="0"/>
               <a:pPr/>
-              <a:t>2017/7/23</a:t>
+              <a:t>2026/2/14</a:t>
             </a:fld>
             <a:endParaRPr lang="zh-TW" altLang="en-US"/>
           </a:p>
@@ -2321,8 +2332,8 @@
         </p:nvSpPr>
         <p:spPr>
           <a:xfrm>
-            <a:off x="1792288" y="4800600"/>
-            <a:ext cx="5486400" cy="566738"/>
+            <a:off x="2389717" y="4800600"/>
+            <a:ext cx="7315200" cy="566738"/>
           </a:xfrm>
         </p:spPr>
         <p:txBody>
@@ -2334,10 +2345,9 @@
           </a:lstStyle>
           <a:p>
             <a:r>
-              <a:rPr lang="zh-TW" altLang="en-US" smtClean="0"/>
+              <a:rPr lang="zh-TW" altLang="en-US"/>
               <a:t>按一下以編輯母片標題樣式</a:t>
             </a:r>
-            <a:endParaRPr lang="zh-TW" altLang="en-US"/>
           </a:p>
         </p:txBody>
       </p:sp>
@@ -2353,8 +2363,8 @@
         </p:nvSpPr>
         <p:spPr>
           <a:xfrm>
-            <a:off x="1792288" y="612775"/>
-            <a:ext cx="5486400" cy="4114800"/>
+            <a:off x="2389717" y="612775"/>
+            <a:ext cx="7315200" cy="4114800"/>
           </a:xfrm>
         </p:spPr>
         <p:txBody>
@@ -2399,10 +2409,9 @@
           </a:lstStyle>
           <a:p>
             <a:r>
-              <a:rPr lang="zh-TW" altLang="en-US" smtClean="0"/>
+              <a:rPr lang="zh-TW" altLang="en-US"/>
               <a:t>按一下圖示以新增圖片</a:t>
             </a:r>
-            <a:endParaRPr lang="zh-TW" altLang="en-US"/>
           </a:p>
         </p:txBody>
       </p:sp>
@@ -2418,8 +2427,8 @@
         </p:nvSpPr>
         <p:spPr>
           <a:xfrm>
-            <a:off x="1792288" y="5367338"/>
-            <a:ext cx="5486400" cy="804862"/>
+            <a:off x="2389717" y="5367338"/>
+            <a:ext cx="7315200" cy="804862"/>
           </a:xfrm>
         </p:spPr>
         <p:txBody>
@@ -2465,7 +2474,7 @@
           <a:p>
             <a:pPr lvl="0"/>
             <a:r>
-              <a:rPr lang="zh-TW" altLang="en-US" smtClean="0"/>
+              <a:rPr lang="zh-TW" altLang="en-US"/>
               <a:t>按一下以編輯母片文字樣式</a:t>
             </a:r>
           </a:p>
@@ -2489,7 +2498,7 @@
             <a:fld id="{C655537E-FC53-4C84-BD1F-251E4CCC7059}" type="datetimeFigureOut">
               <a:rPr lang="zh-TW" altLang="en-US" smtClean="0"/>
               <a:pPr/>
-              <a:t>2017/7/23</a:t>
+              <a:t>2026/2/14</a:t>
             </a:fld>
             <a:endParaRPr lang="zh-TW" altLang="en-US"/>
           </a:p>
@@ -2585,8 +2594,8 @@
         </p:nvSpPr>
         <p:spPr>
           <a:xfrm>
-            <a:off x="457200" y="274638"/>
-            <a:ext cx="8229600" cy="1143000"/>
+            <a:off x="609600" y="274638"/>
+            <a:ext cx="10972800" cy="1143000"/>
           </a:xfrm>
           <a:prstGeom prst="rect">
             <a:avLst/>
@@ -2599,10 +2608,9 @@
           <a:lstStyle/>
           <a:p>
             <a:r>
-              <a:rPr lang="zh-TW" altLang="en-US" smtClean="0"/>
+              <a:rPr lang="zh-TW" altLang="en-US"/>
               <a:t>按一下以編輯母片標題樣式</a:t>
             </a:r>
-            <a:endParaRPr lang="zh-TW" altLang="en-US"/>
           </a:p>
         </p:txBody>
       </p:sp>
@@ -2618,8 +2626,8 @@
         </p:nvSpPr>
         <p:spPr>
           <a:xfrm>
-            <a:off x="457200" y="1600200"/>
-            <a:ext cx="8229600" cy="4525963"/>
+            <a:off x="609600" y="1600201"/>
+            <a:ext cx="10972800" cy="4525963"/>
           </a:xfrm>
           <a:prstGeom prst="rect">
             <a:avLst/>
@@ -2633,38 +2641,37 @@
           <a:p>
             <a:pPr lvl="0"/>
             <a:r>
-              <a:rPr lang="zh-TW" altLang="en-US" smtClean="0"/>
+              <a:rPr lang="zh-TW" altLang="en-US"/>
               <a:t>按一下以編輯母片文字樣式</a:t>
             </a:r>
           </a:p>
           <a:p>
             <a:pPr lvl="1"/>
             <a:r>
-              <a:rPr lang="zh-TW" altLang="en-US" smtClean="0"/>
+              <a:rPr lang="zh-TW" altLang="en-US"/>
               <a:t>第二層</a:t>
             </a:r>
           </a:p>
           <a:p>
             <a:pPr lvl="2"/>
             <a:r>
-              <a:rPr lang="zh-TW" altLang="en-US" smtClean="0"/>
+              <a:rPr lang="zh-TW" altLang="en-US"/>
               <a:t>第三層</a:t>
             </a:r>
           </a:p>
           <a:p>
             <a:pPr lvl="3"/>
             <a:r>
-              <a:rPr lang="zh-TW" altLang="en-US" smtClean="0"/>
+              <a:rPr lang="zh-TW" altLang="en-US"/>
               <a:t>第四層</a:t>
             </a:r>
           </a:p>
           <a:p>
             <a:pPr lvl="4"/>
             <a:r>
-              <a:rPr lang="zh-TW" altLang="en-US" smtClean="0"/>
+              <a:rPr lang="zh-TW" altLang="en-US"/>
               <a:t>第五層</a:t>
             </a:r>
-            <a:endParaRPr lang="zh-TW" altLang="en-US"/>
           </a:p>
         </p:txBody>
       </p:sp>
@@ -2680,8 +2687,8 @@
         </p:nvSpPr>
         <p:spPr>
           <a:xfrm>
-            <a:off x="457200" y="6356350"/>
-            <a:ext cx="2133600" cy="365125"/>
+            <a:off x="609600" y="6356351"/>
+            <a:ext cx="2844800" cy="365125"/>
           </a:xfrm>
           <a:prstGeom prst="rect">
             <a:avLst/>
@@ -2704,7 +2711,7 @@
             <a:fld id="{C655537E-FC53-4C84-BD1F-251E4CCC7059}" type="datetimeFigureOut">
               <a:rPr lang="zh-TW" altLang="en-US" smtClean="0"/>
               <a:pPr/>
-              <a:t>2017/7/23</a:t>
+              <a:t>2026/2/14</a:t>
             </a:fld>
             <a:endParaRPr lang="zh-TW" altLang="en-US"/>
           </a:p>
@@ -2722,8 +2729,8 @@
         </p:nvSpPr>
         <p:spPr>
           <a:xfrm>
-            <a:off x="3124200" y="6356350"/>
-            <a:ext cx="2895600" cy="365125"/>
+            <a:off x="4165600" y="6356351"/>
+            <a:ext cx="3860800" cy="365125"/>
           </a:xfrm>
           <a:prstGeom prst="rect">
             <a:avLst/>
@@ -2759,8 +2766,8 @@
         </p:nvSpPr>
         <p:spPr>
           <a:xfrm>
-            <a:off x="6553200" y="6356350"/>
-            <a:ext cx="2133600" cy="365125"/>
+            <a:off x="8737600" y="6356351"/>
+            <a:ext cx="2844800" cy="365125"/>
           </a:xfrm>
           <a:prstGeom prst="rect">
             <a:avLst/>
@@ -3085,34 +3092,133 @@
             <p:ph type="title"/>
           </p:nvPr>
         </p:nvSpPr>
-        <p:spPr/>
-        <p:txBody>
-          <a:bodyPr/>
-          <a:lstStyle/>
-          <a:p>
-            <a:r>
-              <a:rPr lang="zh-TW" altLang="en-US" b="1" dirty="0" smtClean="0">
+        <p:spPr>
+          <a:xfrm>
+            <a:off x="0" y="2660915"/>
+            <a:ext cx="12192000" cy="1143000"/>
+          </a:xfrm>
+        </p:spPr>
+        <p:txBody>
+          <a:bodyPr>
+            <a:noAutofit/>
+          </a:bodyPr>
+          <a:lstStyle/>
+          <a:p>
+            <a:r>
+              <a:rPr lang="zh-CN" altLang="en-US" sz="5333" b="1" u="sng" dirty="0">
                 <a:solidFill>
                   <a:srgbClr val="000066"/>
                 </a:solidFill>
+                <a:effectLst>
+                  <a:outerShdw blurRad="38100" dist="38100" dir="2700000" algn="tl">
+                    <a:srgbClr val="000000">
+                      <a:alpha val="43137"/>
+                    </a:srgbClr>
+                  </a:outerShdw>
+                </a:effectLst>
+                <a:latin typeface="微軟正黑體" pitchFamily="34" charset="-120"/>
+                <a:ea typeface="微軟正黑體" pitchFamily="34" charset="-120"/>
+              </a:rPr>
+              <a:t>宣道詩 </a:t>
+            </a:r>
+            <a:r>
+              <a:rPr lang="en-US" altLang="zh-CN" sz="5333" b="1" u="sng" dirty="0">
+                <a:solidFill>
+                  <a:srgbClr val="000066"/>
+                </a:solidFill>
+                <a:effectLst>
+                  <a:outerShdw blurRad="38100" dist="38100" dir="2700000" algn="tl">
+                    <a:srgbClr val="000000">
+                      <a:alpha val="43137"/>
+                    </a:srgbClr>
+                  </a:outerShdw>
+                </a:effectLst>
+                <a:latin typeface="微軟正黑體" pitchFamily="34" charset="-120"/>
+                <a:ea typeface="微軟正黑體" pitchFamily="34" charset="-120"/>
+              </a:rPr>
+              <a:t>250</a:t>
+            </a:r>
+            <a:br>
+              <a:rPr lang="en-US" altLang="zh-CN" sz="7200" b="1" i="1" dirty="0">
+                <a:solidFill>
+                  <a:srgbClr val="660033"/>
+                </a:solidFill>
+                <a:effectLst>
+                  <a:outerShdw blurRad="38100" dist="38100" dir="2700000" algn="tl">
+                    <a:srgbClr val="000000">
+                      <a:alpha val="43137"/>
+                    </a:srgbClr>
+                  </a:outerShdw>
+                </a:effectLst>
+                <a:latin typeface="微軟正黑體" pitchFamily="34" charset="-120"/>
+                <a:ea typeface="微軟正黑體" pitchFamily="34" charset="-120"/>
+              </a:rPr>
+            </a:br>
+            <a:r>
+              <a:rPr lang="zh-TW" altLang="en-US" sz="8000" b="1" dirty="0">
+                <a:solidFill>
+                  <a:srgbClr val="660033"/>
+                </a:solidFill>
+                <a:effectLst>
+                  <a:outerShdw blurRad="38100" dist="38100" dir="2700000" algn="tl">
+                    <a:srgbClr val="000000">
+                      <a:alpha val="43137"/>
+                    </a:srgbClr>
+                  </a:outerShdw>
+                </a:effectLst>
                 <a:latin typeface="微軟正黑體" pitchFamily="34" charset="-120"/>
                 <a:ea typeface="微軟正黑體" pitchFamily="34" charset="-120"/>
               </a:rPr>
               <a:t>往天行走</a:t>
             </a:r>
-            <a:endParaRPr lang="zh-TW" altLang="en-US" dirty="0">
-              <a:solidFill>
-                <a:srgbClr val="000066"/>
-              </a:solidFill>
-              <a:latin typeface="微軟正黑體" pitchFamily="34" charset="-120"/>
-              <a:ea typeface="微軟正黑體" pitchFamily="34" charset="-120"/>
-            </a:endParaRPr>
-          </a:p>
-        </p:txBody>
-      </p:sp>
-      <p:sp>
-        <p:nvSpPr>
-          <p:cNvPr id="5" name="內容版面配置區 4"/>
+          </a:p>
+        </p:txBody>
+      </p:sp>
+    </p:spTree>
+    <p:extLst>
+      <p:ext uri="{BB962C8B-B14F-4D97-AF65-F5344CB8AC3E}">
+        <p14:creationId xmlns:p14="http://schemas.microsoft.com/office/powerpoint/2010/main" val="3724263107"/>
+      </p:ext>
+    </p:extLst>
+  </p:cSld>
+  <p:clrMapOvr>
+    <a:masterClrMapping/>
+  </p:clrMapOvr>
+</p:sld>
+</file>
+
+<file path=ppt/slides/slide10.xml><?xml version="1.0" encoding="utf-8"?>
+<p:sld xmlns:a="http://schemas.openxmlformats.org/drawingml/2006/main" xmlns:r="http://schemas.openxmlformats.org/officeDocument/2006/relationships" xmlns:p="http://schemas.openxmlformats.org/presentationml/2006/main">
+  <p:cSld>
+    <p:spTree>
+      <p:nvGrpSpPr>
+        <p:cNvPr id="1" name="">
+          <a:extLst>
+            <a:ext uri="{FF2B5EF4-FFF2-40B4-BE49-F238E27FC236}">
+              <a16:creationId xmlns:a16="http://schemas.microsoft.com/office/drawing/2014/main" id="{631E9270-A866-9FBF-E368-31F079D46840}"/>
+            </a:ext>
+          </a:extLst>
+        </p:cNvPr>
+        <p:cNvGrpSpPr/>
+        <p:nvPr/>
+      </p:nvGrpSpPr>
+      <p:grpSpPr>
+        <a:xfrm>
+          <a:off x="0" y="0"/>
+          <a:ext cx="0" cy="0"/>
+          <a:chOff x="0" y="0"/>
+          <a:chExt cx="0" cy="0"/>
+        </a:xfrm>
+      </p:grpSpPr>
+      <p:sp>
+        <p:nvSpPr>
+          <p:cNvPr id="5" name="內容版面配置區 4">
+            <a:extLst>
+              <a:ext uri="{FF2B5EF4-FFF2-40B4-BE49-F238E27FC236}">
+                <a16:creationId xmlns:a16="http://schemas.microsoft.com/office/drawing/2014/main" id="{5A770B5F-3B6C-2FED-50AE-0F35735ED4A9}"/>
+              </a:ext>
+            </a:extLst>
+          </p:cNvPr>
           <p:cNvSpPr>
             <a:spLocks noGrp="1"/>
           </p:cNvSpPr>
@@ -3122,217 +3228,1206 @@
         </p:nvSpPr>
         <p:spPr>
           <a:xfrm>
-            <a:off x="0" y="1600200"/>
-            <a:ext cx="9144000" cy="5257800"/>
+            <a:off x="0" y="2084851"/>
+            <a:ext cx="12192000" cy="2404863"/>
           </a:xfrm>
         </p:spPr>
         <p:txBody>
-          <a:bodyPr>
+          <a:bodyPr anchor="ctr">
             <a:normAutofit/>
           </a:bodyPr>
           <a:lstStyle/>
           <a:p>
-            <a:pPr algn="ctr">
+            <a:pPr marL="0" indent="0" algn="ctr">
               <a:buNone/>
             </a:pPr>
             <a:r>
-              <a:rPr lang="zh-TW" altLang="en-US" sz="5400" b="1" dirty="0" smtClean="0">
-                <a:solidFill>
-                  <a:srgbClr val="000066"/>
-                </a:solidFill>
-                <a:latin typeface="微軟正黑體" pitchFamily="34" charset="-120"/>
-                <a:ea typeface="微軟正黑體" pitchFamily="34" charset="-120"/>
+              <a:rPr lang="zh-TW" altLang="en-US" sz="6400" b="1" dirty="0">
+                <a:solidFill>
+                  <a:srgbClr val="660033"/>
+                </a:solidFill>
+                <a:latin typeface="Microsoft JhengHei" pitchFamily="34" charset="-120"/>
+                <a:ea typeface="Microsoft JhengHei" pitchFamily="34" charset="-120"/>
               </a:rPr>
-              <a:t>凡敬愛主的人</a:t>
-            </a:r>
-            <a:r>
-              <a:rPr lang="en-US" altLang="zh-TW" sz="5400" b="1" dirty="0" smtClean="0">
-                <a:solidFill>
-                  <a:srgbClr val="000066"/>
-                </a:solidFill>
-                <a:latin typeface="微軟正黑體" pitchFamily="34" charset="-120"/>
-                <a:ea typeface="微軟正黑體" pitchFamily="34" charset="-120"/>
+              <a:t>今同心往聖山</a:t>
+            </a:r>
+          </a:p>
+          <a:p>
+            <a:pPr marL="0" indent="0" algn="ctr">
+              <a:buNone/>
+            </a:pPr>
+            <a:r>
+              <a:rPr lang="zh-TW" altLang="en-US" sz="6400" b="1" dirty="0">
+                <a:solidFill>
+                  <a:srgbClr val="660033"/>
+                </a:solidFill>
+                <a:latin typeface="Microsoft JhengHei" pitchFamily="34" charset="-120"/>
+                <a:ea typeface="Microsoft JhengHei" pitchFamily="34" charset="-120"/>
               </a:rPr>
-              <a:t>  </a:t>
-            </a:r>
-            <a:r>
-              <a:rPr lang="zh-TW" altLang="en-US" sz="5400" b="1" dirty="0" smtClean="0">
-                <a:solidFill>
-                  <a:srgbClr val="000066"/>
-                </a:solidFill>
-                <a:latin typeface="微軟正黑體" pitchFamily="34" charset="-120"/>
-                <a:ea typeface="微軟正黑體" pitchFamily="34" charset="-120"/>
-              </a:rPr>
-              <a:t>可歡然來讚美</a:t>
-            </a:r>
-            <a:endParaRPr lang="en-US" altLang="zh-TW" sz="5400" b="1" dirty="0" smtClean="0">
-              <a:solidFill>
-                <a:srgbClr val="000066"/>
-              </a:solidFill>
-              <a:latin typeface="微軟正黑體" pitchFamily="34" charset="-120"/>
-              <a:ea typeface="微軟正黑體" pitchFamily="34" charset="-120"/>
-            </a:endParaRPr>
-          </a:p>
-          <a:p>
-            <a:pPr algn="ctr">
-              <a:buNone/>
-            </a:pPr>
-            <a:r>
-              <a:rPr lang="zh-TW" altLang="en-US" sz="5400" b="1" dirty="0" smtClean="0">
-                <a:solidFill>
-                  <a:srgbClr val="000066"/>
-                </a:solidFill>
-                <a:latin typeface="微軟正黑體" pitchFamily="34" charset="-120"/>
-                <a:ea typeface="微軟正黑體" pitchFamily="34" charset="-120"/>
-              </a:rPr>
-              <a:t>同心同聲頌揚主恩</a:t>
-            </a:r>
-            <a:endParaRPr lang="en-US" altLang="zh-TW" sz="5400" b="1" dirty="0" smtClean="0">
-              <a:solidFill>
-                <a:srgbClr val="000066"/>
-              </a:solidFill>
-              <a:latin typeface="微軟正黑體" pitchFamily="34" charset="-120"/>
-              <a:ea typeface="微軟正黑體" pitchFamily="34" charset="-120"/>
-            </a:endParaRPr>
-          </a:p>
-          <a:p>
-            <a:pPr algn="ctr">
-              <a:buNone/>
-            </a:pPr>
-            <a:r>
-              <a:rPr lang="zh-TW" altLang="en-US" sz="5400" b="1" dirty="0" smtClean="0">
-                <a:solidFill>
-                  <a:srgbClr val="000066"/>
-                </a:solidFill>
-                <a:latin typeface="微軟正黑體" pitchFamily="34" charset="-120"/>
-                <a:ea typeface="微軟正黑體" pitchFamily="34" charset="-120"/>
-              </a:rPr>
-              <a:t>同心同聲頌揚主恩</a:t>
-            </a:r>
-            <a:endParaRPr lang="en-US" altLang="zh-TW" sz="5400" b="1" dirty="0" smtClean="0">
-              <a:solidFill>
-                <a:srgbClr val="000066"/>
-              </a:solidFill>
-              <a:latin typeface="微軟正黑體" pitchFamily="34" charset="-120"/>
-              <a:ea typeface="微軟正黑體" pitchFamily="34" charset="-120"/>
-            </a:endParaRPr>
-          </a:p>
-          <a:p>
-            <a:pPr algn="ctr">
-              <a:buNone/>
-            </a:pPr>
-            <a:r>
-              <a:rPr lang="zh-TW" altLang="en-US" sz="5400" b="1" dirty="0" smtClean="0">
-                <a:solidFill>
-                  <a:srgbClr val="000066"/>
-                </a:solidFill>
-                <a:latin typeface="微軟正黑體" pitchFamily="34" charset="-120"/>
-                <a:ea typeface="微軟正黑體" pitchFamily="34" charset="-120"/>
-              </a:rPr>
-              <a:t>皆環繞主座位  皆環繞主座位</a:t>
-            </a:r>
-            <a:endParaRPr lang="zh-TW" altLang="en-US" sz="5400" b="1" dirty="0">
-              <a:solidFill>
-                <a:srgbClr val="000066"/>
-              </a:solidFill>
-              <a:latin typeface="微軟正黑體" pitchFamily="34" charset="-120"/>
-              <a:ea typeface="微軟正黑體" pitchFamily="34" charset="-120"/>
-            </a:endParaRPr>
-          </a:p>
-        </p:txBody>
-      </p:sp>
-      <p:sp>
-        <p:nvSpPr>
-          <p:cNvPr id="6" name="標題 3"/>
-          <p:cNvSpPr txBox="1">
-            <a:spLocks/>
-          </p:cNvSpPr>
-          <p:nvPr/>
+              <a:t>就是那佳美之錫安</a:t>
+            </a:r>
+          </a:p>
+        </p:txBody>
+      </p:sp>
+    </p:spTree>
+    <p:extLst>
+      <p:ext uri="{BB962C8B-B14F-4D97-AF65-F5344CB8AC3E}">
+        <p14:creationId xmlns:p14="http://schemas.microsoft.com/office/powerpoint/2010/main" val="17409187"/>
+      </p:ext>
+    </p:extLst>
+  </p:cSld>
+  <p:clrMapOvr>
+    <a:masterClrMapping/>
+  </p:clrMapOvr>
+</p:sld>
+</file>
+
+<file path=ppt/slides/slide11.xml><?xml version="1.0" encoding="utf-8"?>
+<p:sld xmlns:a="http://schemas.openxmlformats.org/drawingml/2006/main" xmlns:r="http://schemas.openxmlformats.org/officeDocument/2006/relationships" xmlns:p="http://schemas.openxmlformats.org/presentationml/2006/main">
+  <p:cSld>
+    <p:spTree>
+      <p:nvGrpSpPr>
+        <p:cNvPr id="1" name="">
+          <a:extLst>
+            <a:ext uri="{FF2B5EF4-FFF2-40B4-BE49-F238E27FC236}">
+              <a16:creationId xmlns:a16="http://schemas.microsoft.com/office/drawing/2014/main" id="{72A445D6-3929-4075-51A3-F56D7C5867DF}"/>
+            </a:ext>
+          </a:extLst>
+        </p:cNvPr>
+        <p:cNvGrpSpPr/>
+        <p:nvPr/>
+      </p:nvGrpSpPr>
+      <p:grpSpPr>
+        <a:xfrm>
+          <a:off x="0" y="0"/>
+          <a:ext cx="0" cy="0"/>
+          <a:chOff x="0" y="0"/>
+          <a:chExt cx="0" cy="0"/>
+        </a:xfrm>
+      </p:grpSpPr>
+      <p:sp>
+        <p:nvSpPr>
+          <p:cNvPr id="5" name="內容版面配置區 4">
+            <a:extLst>
+              <a:ext uri="{FF2B5EF4-FFF2-40B4-BE49-F238E27FC236}">
+                <a16:creationId xmlns:a16="http://schemas.microsoft.com/office/drawing/2014/main" id="{C75FFCCF-2B2A-7C83-375D-C617FAE13043}"/>
+              </a:ext>
+            </a:extLst>
+          </p:cNvPr>
+          <p:cNvSpPr>
+            <a:spLocks noGrp="1"/>
+          </p:cNvSpPr>
+          <p:nvPr>
+            <p:ph idx="1"/>
+          </p:nvPr>
         </p:nvSpPr>
         <p:spPr>
           <a:xfrm>
-            <a:off x="0" y="6429396"/>
-            <a:ext cx="1357290" cy="428604"/>
+            <a:off x="0" y="2084851"/>
+            <a:ext cx="12192000" cy="2404863"/>
+          </a:xfrm>
+        </p:spPr>
+        <p:txBody>
+          <a:bodyPr anchor="ctr">
+            <a:normAutofit/>
+          </a:bodyPr>
+          <a:lstStyle/>
+          <a:p>
+            <a:pPr marL="0" indent="0" algn="ctr">
+              <a:buNone/>
+            </a:pPr>
+            <a:r>
+              <a:rPr lang="zh-TW" altLang="en-US" sz="6400" b="1" dirty="0">
+                <a:solidFill>
+                  <a:srgbClr val="660033"/>
+                </a:solidFill>
+                <a:latin typeface="Microsoft JhengHei" pitchFamily="34" charset="-120"/>
+                <a:ea typeface="Microsoft JhengHei" pitchFamily="34" charset="-120"/>
+              </a:rPr>
+              <a:t>大家齊步奔往聖山</a:t>
+            </a:r>
+          </a:p>
+          <a:p>
+            <a:pPr marL="0" indent="0" algn="ctr">
+              <a:buNone/>
+            </a:pPr>
+            <a:r>
+              <a:rPr lang="zh-TW" altLang="en-US" sz="6400" b="1" dirty="0">
+                <a:solidFill>
+                  <a:srgbClr val="660033"/>
+                </a:solidFill>
+                <a:latin typeface="Microsoft JhengHei" pitchFamily="34" charset="-120"/>
+                <a:ea typeface="Microsoft JhengHei" pitchFamily="34" charset="-120"/>
+              </a:rPr>
+              <a:t>仰望那佳美之聖城</a:t>
+            </a:r>
+          </a:p>
+        </p:txBody>
+      </p:sp>
+    </p:spTree>
+    <p:extLst>
+      <p:ext uri="{BB962C8B-B14F-4D97-AF65-F5344CB8AC3E}">
+        <p14:creationId xmlns:p14="http://schemas.microsoft.com/office/powerpoint/2010/main" val="412378162"/>
+      </p:ext>
+    </p:extLst>
+  </p:cSld>
+  <p:clrMapOvr>
+    <a:masterClrMapping/>
+  </p:clrMapOvr>
+</p:sld>
+</file>
+
+<file path=ppt/slides/slide12.xml><?xml version="1.0" encoding="utf-8"?>
+<p:sld xmlns:a="http://schemas.openxmlformats.org/drawingml/2006/main" xmlns:r="http://schemas.openxmlformats.org/officeDocument/2006/relationships" xmlns:p="http://schemas.openxmlformats.org/presentationml/2006/main">
+  <p:cSld>
+    <p:spTree>
+      <p:nvGrpSpPr>
+        <p:cNvPr id="1" name="">
+          <a:extLst>
+            <a:ext uri="{FF2B5EF4-FFF2-40B4-BE49-F238E27FC236}">
+              <a16:creationId xmlns:a16="http://schemas.microsoft.com/office/drawing/2014/main" id="{AD3EE60D-5064-4B79-E2EA-009EFE561527}"/>
+            </a:ext>
+          </a:extLst>
+        </p:cNvPr>
+        <p:cNvGrpSpPr/>
+        <p:nvPr/>
+      </p:nvGrpSpPr>
+      <p:grpSpPr>
+        <a:xfrm>
+          <a:off x="0" y="0"/>
+          <a:ext cx="0" cy="0"/>
+          <a:chOff x="0" y="0"/>
+          <a:chExt cx="0" cy="0"/>
+        </a:xfrm>
+      </p:grpSpPr>
+      <p:sp>
+        <p:nvSpPr>
+          <p:cNvPr id="5" name="內容版面配置區 4">
+            <a:extLst>
+              <a:ext uri="{FF2B5EF4-FFF2-40B4-BE49-F238E27FC236}">
+                <a16:creationId xmlns:a16="http://schemas.microsoft.com/office/drawing/2014/main" id="{0FF1389C-2432-9A91-EBBA-233F0B0F4EBD}"/>
+              </a:ext>
+            </a:extLst>
+          </p:cNvPr>
+          <p:cNvSpPr>
+            <a:spLocks noGrp="1"/>
+          </p:cNvSpPr>
+          <p:nvPr>
+            <p:ph idx="1"/>
+          </p:nvPr>
+        </p:nvSpPr>
+        <p:spPr>
+          <a:xfrm>
+            <a:off x="0" y="2084851"/>
+            <a:ext cx="12192000" cy="2404863"/>
+          </a:xfrm>
+        </p:spPr>
+        <p:txBody>
+          <a:bodyPr anchor="ctr">
+            <a:normAutofit/>
+          </a:bodyPr>
+          <a:lstStyle/>
+          <a:p>
+            <a:pPr marL="0" indent="0" algn="ctr">
+              <a:buNone/>
+            </a:pPr>
+            <a:r>
+              <a:rPr lang="zh-TW" altLang="en-US" sz="6400" b="1" dirty="0">
+                <a:solidFill>
+                  <a:srgbClr val="660033"/>
+                </a:solidFill>
+                <a:latin typeface="Microsoft JhengHei" pitchFamily="34" charset="-120"/>
+                <a:ea typeface="Microsoft JhengHei" pitchFamily="34" charset="-120"/>
+              </a:rPr>
+              <a:t>未走到天上城</a:t>
+            </a:r>
+            <a:endParaRPr lang="en-US" altLang="zh-TW" sz="6400" b="1" dirty="0">
+              <a:solidFill>
+                <a:srgbClr val="660033"/>
+              </a:solidFill>
+              <a:latin typeface="Microsoft JhengHei" pitchFamily="34" charset="-120"/>
+              <a:ea typeface="Microsoft JhengHei" pitchFamily="34" charset="-120"/>
+            </a:endParaRPr>
+          </a:p>
+          <a:p>
+            <a:pPr marL="0" indent="0" algn="ctr">
+              <a:buNone/>
+            </a:pPr>
+            <a:r>
+              <a:rPr lang="zh-TW" altLang="en-US" sz="6400" b="1" dirty="0">
+                <a:solidFill>
+                  <a:srgbClr val="660033"/>
+                </a:solidFill>
+                <a:latin typeface="Microsoft JhengHei" pitchFamily="34" charset="-120"/>
+                <a:ea typeface="Microsoft JhengHei" pitchFamily="34" charset="-120"/>
+              </a:rPr>
+              <a:t>未行那黃金路</a:t>
+            </a:r>
+          </a:p>
+        </p:txBody>
+      </p:sp>
+      <p:sp>
+        <p:nvSpPr>
+          <p:cNvPr id="3" name="TextBox 2">
+            <a:extLst>
+              <a:ext uri="{FF2B5EF4-FFF2-40B4-BE49-F238E27FC236}">
+                <a16:creationId xmlns:a16="http://schemas.microsoft.com/office/drawing/2014/main" id="{94EE4DC3-7BE4-2CFA-8CEA-AFAD5703A94D}"/>
+              </a:ext>
+            </a:extLst>
+          </p:cNvPr>
+          <p:cNvSpPr txBox="1"/>
+          <p:nvPr/>
+        </p:nvSpPr>
+        <p:spPr>
+          <a:xfrm>
+            <a:off x="0" y="5061182"/>
+            <a:ext cx="12192000" cy="646331"/>
           </a:xfrm>
           <a:prstGeom prst="rect">
             <a:avLst/>
           </a:prstGeom>
+          <a:noFill/>
         </p:spPr>
         <p:txBody>
-          <a:bodyPr vert="horz" lIns="91440" tIns="45720" rIns="91440" bIns="45720" rtlCol="0" anchor="ctr">
+          <a:bodyPr wrap="square" rtlCol="0">
+            <a:spAutoFit/>
+          </a:bodyPr>
+          <a:lstStyle/>
+          <a:p>
+            <a:pPr algn="ctr"/>
+            <a:r>
+              <a:rPr lang="en-US" sz="3600" b="1" dirty="0">
+                <a:solidFill>
+                  <a:srgbClr val="660033"/>
+                </a:solidFill>
+              </a:rPr>
+              <a:t>( 3 / 4 )</a:t>
+            </a:r>
+            <a:endParaRPr lang="vi-VN" sz="3600" b="1" dirty="0">
+              <a:solidFill>
+                <a:srgbClr val="660033"/>
+              </a:solidFill>
+            </a:endParaRPr>
+          </a:p>
+        </p:txBody>
+      </p:sp>
+    </p:spTree>
+    <p:extLst>
+      <p:ext uri="{BB962C8B-B14F-4D97-AF65-F5344CB8AC3E}">
+        <p14:creationId xmlns:p14="http://schemas.microsoft.com/office/powerpoint/2010/main" val="715353390"/>
+      </p:ext>
+    </p:extLst>
+  </p:cSld>
+  <p:clrMapOvr>
+    <a:masterClrMapping/>
+  </p:clrMapOvr>
+</p:sld>
+</file>
+
+<file path=ppt/slides/slide13.xml><?xml version="1.0" encoding="utf-8"?>
+<p:sld xmlns:a="http://schemas.openxmlformats.org/drawingml/2006/main" xmlns:r="http://schemas.openxmlformats.org/officeDocument/2006/relationships" xmlns:p="http://schemas.openxmlformats.org/presentationml/2006/main">
+  <p:cSld>
+    <p:spTree>
+      <p:nvGrpSpPr>
+        <p:cNvPr id="1" name="">
+          <a:extLst>
+            <a:ext uri="{FF2B5EF4-FFF2-40B4-BE49-F238E27FC236}">
+              <a16:creationId xmlns:a16="http://schemas.microsoft.com/office/drawing/2014/main" id="{6284EC08-D43D-40A6-DEE9-12CD0AB4DB1C}"/>
+            </a:ext>
+          </a:extLst>
+        </p:cNvPr>
+        <p:cNvGrpSpPr/>
+        <p:nvPr/>
+      </p:nvGrpSpPr>
+      <p:grpSpPr>
+        <a:xfrm>
+          <a:off x="0" y="0"/>
+          <a:ext cx="0" cy="0"/>
+          <a:chOff x="0" y="0"/>
+          <a:chExt cx="0" cy="0"/>
+        </a:xfrm>
+      </p:grpSpPr>
+      <p:sp>
+        <p:nvSpPr>
+          <p:cNvPr id="5" name="內容版面配置區 4">
+            <a:extLst>
+              <a:ext uri="{FF2B5EF4-FFF2-40B4-BE49-F238E27FC236}">
+                <a16:creationId xmlns:a16="http://schemas.microsoft.com/office/drawing/2014/main" id="{D50683E1-CBDC-39CC-AF1E-46CC90D7F387}"/>
+              </a:ext>
+            </a:extLst>
+          </p:cNvPr>
+          <p:cNvSpPr>
+            <a:spLocks noGrp="1"/>
+          </p:cNvSpPr>
+          <p:nvPr>
+            <p:ph idx="1"/>
+          </p:nvPr>
+        </p:nvSpPr>
+        <p:spPr>
+          <a:xfrm>
+            <a:off x="0" y="2084851"/>
+            <a:ext cx="12192000" cy="2404863"/>
+          </a:xfrm>
+        </p:spPr>
+        <p:txBody>
+          <a:bodyPr anchor="ctr">
             <a:normAutofit/>
           </a:bodyPr>
           <a:lstStyle/>
           <a:p>
-            <a:pPr marL="0" marR="0" lvl="0" indent="0" algn="ctr" defTabSz="914400" rtl="0" eaLnBrk="1" fontAlgn="auto" latinLnBrk="0" hangingPunct="1">
-              <a:lnSpc>
-                <a:spcPct val="100000"/>
-              </a:lnSpc>
-              <a:spcBef>
-                <a:spcPct val="0"/>
-              </a:spcBef>
-              <a:spcAft>
-                <a:spcPts val="0"/>
-              </a:spcAft>
-              <a:buClrTx/>
-              <a:buSzTx/>
-              <a:buFontTx/>
-              <a:buNone/>
-              <a:tabLst/>
-              <a:defRPr/>
+            <a:pPr marL="0" indent="0" algn="ctr">
+              <a:buNone/>
             </a:pPr>
             <a:r>
-              <a:rPr kumimoji="0" lang="zh-TW" altLang="en-US" sz="1500" b="1" i="0" u="none" strike="noStrike" kern="1200" cap="none" spc="0" normalizeH="0" baseline="0" noProof="0" dirty="0" smtClean="0">
-                <a:ln>
-                  <a:noFill/>
-                </a:ln>
-                <a:solidFill>
-                  <a:srgbClr val="000066"/>
-                </a:solidFill>
-                <a:effectLst/>
-                <a:uLnTx/>
-                <a:uFillTx/>
-                <a:latin typeface="微軟正黑體" pitchFamily="34" charset="-120"/>
-                <a:ea typeface="微軟正黑體" pitchFamily="34" charset="-120"/>
-                <a:cs typeface="+mj-cs"/>
+              <a:rPr lang="zh-TW" altLang="en-US" sz="6400" b="1" dirty="0">
+                <a:solidFill>
+                  <a:srgbClr val="660033"/>
+                </a:solidFill>
+                <a:latin typeface="Microsoft JhengHei" pitchFamily="34" charset="-120"/>
+                <a:ea typeface="Microsoft JhengHei" pitchFamily="34" charset="-120"/>
               </a:rPr>
-              <a:t>往天行走</a:t>
-            </a:r>
-            <a:r>
-              <a:rPr kumimoji="0" lang="en-US" altLang="zh-CN" sz="1500" b="1" i="0" u="none" strike="noStrike" kern="1200" cap="none" spc="0" normalizeH="0" baseline="0" noProof="0" dirty="0" smtClean="0">
-                <a:ln>
-                  <a:noFill/>
-                </a:ln>
-                <a:solidFill>
-                  <a:srgbClr val="000066"/>
-                </a:solidFill>
-                <a:effectLst/>
-                <a:uLnTx/>
-                <a:uFillTx/>
-                <a:latin typeface="微軟正黑體" pitchFamily="34" charset="-120"/>
-                <a:ea typeface="微軟正黑體" pitchFamily="34" charset="-120"/>
-                <a:cs typeface="+mj-cs"/>
+              <a:t>從主的民已得太平</a:t>
+            </a:r>
+          </a:p>
+          <a:p>
+            <a:pPr marL="0" indent="0" algn="ctr">
+              <a:buNone/>
+            </a:pPr>
+            <a:r>
+              <a:rPr lang="zh-TW" altLang="en-US" sz="6400" b="1" dirty="0">
+                <a:solidFill>
+                  <a:srgbClr val="660033"/>
+                </a:solidFill>
+                <a:latin typeface="Microsoft JhengHei" pitchFamily="34" charset="-120"/>
+                <a:ea typeface="Microsoft JhengHei" pitchFamily="34" charset="-120"/>
               </a:rPr>
-              <a:t>1/8</a:t>
-            </a:r>
-            <a:endParaRPr kumimoji="0" lang="zh-TW" altLang="en-US" sz="1500" b="0" i="0" u="none" strike="noStrike" kern="1200" cap="none" spc="0" normalizeH="0" baseline="0" noProof="0" dirty="0">
-              <a:ln>
-                <a:noFill/>
-              </a:ln>
+              <a:t>從主的民已得太平</a:t>
+            </a:r>
+          </a:p>
+        </p:txBody>
+      </p:sp>
+      <p:sp>
+        <p:nvSpPr>
+          <p:cNvPr id="3" name="TextBox 2">
+            <a:extLst>
+              <a:ext uri="{FF2B5EF4-FFF2-40B4-BE49-F238E27FC236}">
+                <a16:creationId xmlns:a16="http://schemas.microsoft.com/office/drawing/2014/main" id="{D3C01A83-9B74-E055-66E7-F5CEAD0256FB}"/>
+              </a:ext>
+            </a:extLst>
+          </p:cNvPr>
+          <p:cNvSpPr txBox="1"/>
+          <p:nvPr/>
+        </p:nvSpPr>
+        <p:spPr>
+          <a:xfrm>
+            <a:off x="0" y="5061182"/>
+            <a:ext cx="12192000" cy="646331"/>
+          </a:xfrm>
+          <a:prstGeom prst="rect">
+            <a:avLst/>
+          </a:prstGeom>
+          <a:noFill/>
+        </p:spPr>
+        <p:txBody>
+          <a:bodyPr wrap="square" rtlCol="0">
+            <a:spAutoFit/>
+          </a:bodyPr>
+          <a:lstStyle/>
+          <a:p>
+            <a:pPr algn="ctr"/>
+            <a:r>
+              <a:rPr lang="en-US" sz="3600" b="1" dirty="0">
+                <a:solidFill>
+                  <a:srgbClr val="660033"/>
+                </a:solidFill>
+              </a:rPr>
+              <a:t>( 3 / 4 )</a:t>
+            </a:r>
+            <a:endParaRPr lang="vi-VN" sz="3600" b="1" dirty="0">
               <a:solidFill>
-                <a:srgbClr val="000066"/>
+                <a:srgbClr val="660033"/>
               </a:solidFill>
-              <a:effectLst/>
-              <a:uLnTx/>
-              <a:uFillTx/>
-              <a:latin typeface="微軟正黑體" pitchFamily="34" charset="-120"/>
-              <a:ea typeface="微軟正黑體" pitchFamily="34" charset="-120"/>
-              <a:cs typeface="+mj-cs"/>
             </a:endParaRPr>
           </a:p>
         </p:txBody>
       </p:sp>
     </p:spTree>
+    <p:extLst>
+      <p:ext uri="{BB962C8B-B14F-4D97-AF65-F5344CB8AC3E}">
+        <p14:creationId xmlns:p14="http://schemas.microsoft.com/office/powerpoint/2010/main" val="1534839046"/>
+      </p:ext>
+    </p:extLst>
+  </p:cSld>
+  <p:clrMapOvr>
+    <a:masterClrMapping/>
+  </p:clrMapOvr>
+</p:sld>
+</file>
+
+<file path=ppt/slides/slide14.xml><?xml version="1.0" encoding="utf-8"?>
+<p:sld xmlns:a="http://schemas.openxmlformats.org/drawingml/2006/main" xmlns:r="http://schemas.openxmlformats.org/officeDocument/2006/relationships" xmlns:p="http://schemas.openxmlformats.org/presentationml/2006/main">
+  <p:cSld>
+    <p:spTree>
+      <p:nvGrpSpPr>
+        <p:cNvPr id="1" name="">
+          <a:extLst>
+            <a:ext uri="{FF2B5EF4-FFF2-40B4-BE49-F238E27FC236}">
+              <a16:creationId xmlns:a16="http://schemas.microsoft.com/office/drawing/2014/main" id="{AC962414-2DC2-9E8E-C1AE-4B833AC68ED7}"/>
+            </a:ext>
+          </a:extLst>
+        </p:cNvPr>
+        <p:cNvGrpSpPr/>
+        <p:nvPr/>
+      </p:nvGrpSpPr>
+      <p:grpSpPr>
+        <a:xfrm>
+          <a:off x="0" y="0"/>
+          <a:ext cx="0" cy="0"/>
+          <a:chOff x="0" y="0"/>
+          <a:chExt cx="0" cy="0"/>
+        </a:xfrm>
+      </p:grpSpPr>
+      <p:sp>
+        <p:nvSpPr>
+          <p:cNvPr id="5" name="內容版面配置區 4">
+            <a:extLst>
+              <a:ext uri="{FF2B5EF4-FFF2-40B4-BE49-F238E27FC236}">
+                <a16:creationId xmlns:a16="http://schemas.microsoft.com/office/drawing/2014/main" id="{90D3D92D-A63F-23E7-A713-182218175615}"/>
+              </a:ext>
+            </a:extLst>
+          </p:cNvPr>
+          <p:cNvSpPr>
+            <a:spLocks noGrp="1"/>
+          </p:cNvSpPr>
+          <p:nvPr>
+            <p:ph idx="1"/>
+          </p:nvPr>
+        </p:nvSpPr>
+        <p:spPr>
+          <a:xfrm>
+            <a:off x="0" y="2084851"/>
+            <a:ext cx="12192000" cy="2404863"/>
+          </a:xfrm>
+        </p:spPr>
+        <p:txBody>
+          <a:bodyPr anchor="ctr">
+            <a:normAutofit/>
+          </a:bodyPr>
+          <a:lstStyle/>
+          <a:p>
+            <a:pPr marL="0" indent="0" algn="ctr">
+              <a:buNone/>
+            </a:pPr>
+            <a:r>
+              <a:rPr lang="zh-TW" altLang="en-US" sz="6400" b="1" dirty="0">
+                <a:solidFill>
+                  <a:srgbClr val="660033"/>
+                </a:solidFill>
+                <a:latin typeface="Microsoft JhengHei" pitchFamily="34" charset="-120"/>
+                <a:ea typeface="Microsoft JhengHei" pitchFamily="34" charset="-120"/>
+              </a:rPr>
+              <a:t>一路蒙福無數</a:t>
+            </a:r>
+            <a:endParaRPr lang="en-US" altLang="zh-TW" sz="6400" b="1" dirty="0">
+              <a:solidFill>
+                <a:srgbClr val="660033"/>
+              </a:solidFill>
+              <a:latin typeface="Microsoft JhengHei" pitchFamily="34" charset="-120"/>
+              <a:ea typeface="Microsoft JhengHei" pitchFamily="34" charset="-120"/>
+            </a:endParaRPr>
+          </a:p>
+          <a:p>
+            <a:pPr marL="0" indent="0" algn="ctr">
+              <a:buNone/>
+            </a:pPr>
+            <a:r>
+              <a:rPr lang="zh-TW" altLang="en-US" sz="6400" b="1" dirty="0">
+                <a:solidFill>
+                  <a:srgbClr val="660033"/>
+                </a:solidFill>
+                <a:latin typeface="Microsoft JhengHei" pitchFamily="34" charset="-120"/>
+                <a:ea typeface="Microsoft JhengHei" pitchFamily="34" charset="-120"/>
+              </a:rPr>
+              <a:t>一路蒙福無數</a:t>
+            </a:r>
+          </a:p>
+        </p:txBody>
+      </p:sp>
+      <p:sp>
+        <p:nvSpPr>
+          <p:cNvPr id="3" name="TextBox 2">
+            <a:extLst>
+              <a:ext uri="{FF2B5EF4-FFF2-40B4-BE49-F238E27FC236}">
+                <a16:creationId xmlns:a16="http://schemas.microsoft.com/office/drawing/2014/main" id="{D0C19675-E1C1-F6B1-A7CF-11662E14BEC5}"/>
+              </a:ext>
+            </a:extLst>
+          </p:cNvPr>
+          <p:cNvSpPr txBox="1"/>
+          <p:nvPr/>
+        </p:nvSpPr>
+        <p:spPr>
+          <a:xfrm>
+            <a:off x="0" y="5061182"/>
+            <a:ext cx="12192000" cy="646331"/>
+          </a:xfrm>
+          <a:prstGeom prst="rect">
+            <a:avLst/>
+          </a:prstGeom>
+          <a:noFill/>
+        </p:spPr>
+        <p:txBody>
+          <a:bodyPr wrap="square" rtlCol="0">
+            <a:spAutoFit/>
+          </a:bodyPr>
+          <a:lstStyle/>
+          <a:p>
+            <a:pPr algn="ctr"/>
+            <a:r>
+              <a:rPr lang="en-US" sz="3600" b="1" dirty="0">
+                <a:solidFill>
+                  <a:srgbClr val="660033"/>
+                </a:solidFill>
+              </a:rPr>
+              <a:t>( 3 / 4 )</a:t>
+            </a:r>
+            <a:endParaRPr lang="vi-VN" sz="3600" b="1" dirty="0">
+              <a:solidFill>
+                <a:srgbClr val="660033"/>
+              </a:solidFill>
+            </a:endParaRPr>
+          </a:p>
+        </p:txBody>
+      </p:sp>
+    </p:spTree>
+    <p:extLst>
+      <p:ext uri="{BB962C8B-B14F-4D97-AF65-F5344CB8AC3E}">
+        <p14:creationId xmlns:p14="http://schemas.microsoft.com/office/powerpoint/2010/main" val="4020646414"/>
+      </p:ext>
+    </p:extLst>
+  </p:cSld>
+  <p:clrMapOvr>
+    <a:masterClrMapping/>
+  </p:clrMapOvr>
+</p:sld>
+</file>
+
+<file path=ppt/slides/slide15.xml><?xml version="1.0" encoding="utf-8"?>
+<p:sld xmlns:a="http://schemas.openxmlformats.org/drawingml/2006/main" xmlns:r="http://schemas.openxmlformats.org/officeDocument/2006/relationships" xmlns:p="http://schemas.openxmlformats.org/presentationml/2006/main">
+  <p:cSld>
+    <p:spTree>
+      <p:nvGrpSpPr>
+        <p:cNvPr id="1" name="">
+          <a:extLst>
+            <a:ext uri="{FF2B5EF4-FFF2-40B4-BE49-F238E27FC236}">
+              <a16:creationId xmlns:a16="http://schemas.microsoft.com/office/drawing/2014/main" id="{C1995F57-0FA4-7C1C-A020-362B25B4D231}"/>
+            </a:ext>
+          </a:extLst>
+        </p:cNvPr>
+        <p:cNvGrpSpPr/>
+        <p:nvPr/>
+      </p:nvGrpSpPr>
+      <p:grpSpPr>
+        <a:xfrm>
+          <a:off x="0" y="0"/>
+          <a:ext cx="0" cy="0"/>
+          <a:chOff x="0" y="0"/>
+          <a:chExt cx="0" cy="0"/>
+        </a:xfrm>
+      </p:grpSpPr>
+      <p:sp>
+        <p:nvSpPr>
+          <p:cNvPr id="5" name="內容版面配置區 4">
+            <a:extLst>
+              <a:ext uri="{FF2B5EF4-FFF2-40B4-BE49-F238E27FC236}">
+                <a16:creationId xmlns:a16="http://schemas.microsoft.com/office/drawing/2014/main" id="{1AA3B05D-DFBE-431E-312A-CC04A19D6FD3}"/>
+              </a:ext>
+            </a:extLst>
+          </p:cNvPr>
+          <p:cNvSpPr>
+            <a:spLocks noGrp="1"/>
+          </p:cNvSpPr>
+          <p:nvPr>
+            <p:ph idx="1"/>
+          </p:nvPr>
+        </p:nvSpPr>
+        <p:spPr>
+          <a:xfrm>
+            <a:off x="0" y="2084851"/>
+            <a:ext cx="12192000" cy="2404863"/>
+          </a:xfrm>
+        </p:spPr>
+        <p:txBody>
+          <a:bodyPr anchor="ctr">
+            <a:normAutofit/>
+          </a:bodyPr>
+          <a:lstStyle/>
+          <a:p>
+            <a:pPr marL="0" indent="0" algn="ctr">
+              <a:buNone/>
+            </a:pPr>
+            <a:r>
+              <a:rPr lang="zh-TW" altLang="en-US" sz="6400" b="1" dirty="0">
+                <a:solidFill>
+                  <a:srgbClr val="660033"/>
+                </a:solidFill>
+                <a:latin typeface="Microsoft JhengHei" pitchFamily="34" charset="-120"/>
+                <a:ea typeface="Microsoft JhengHei" pitchFamily="34" charset="-120"/>
+              </a:rPr>
+              <a:t>今同心往聖山</a:t>
+            </a:r>
+          </a:p>
+          <a:p>
+            <a:pPr marL="0" indent="0" algn="ctr">
+              <a:buNone/>
+            </a:pPr>
+            <a:r>
+              <a:rPr lang="zh-TW" altLang="en-US" sz="6400" b="1" dirty="0">
+                <a:solidFill>
+                  <a:srgbClr val="660033"/>
+                </a:solidFill>
+                <a:latin typeface="Microsoft JhengHei" pitchFamily="34" charset="-120"/>
+                <a:ea typeface="Microsoft JhengHei" pitchFamily="34" charset="-120"/>
+              </a:rPr>
+              <a:t>就是那佳美之錫安</a:t>
+            </a:r>
+          </a:p>
+        </p:txBody>
+      </p:sp>
+    </p:spTree>
+    <p:extLst>
+      <p:ext uri="{BB962C8B-B14F-4D97-AF65-F5344CB8AC3E}">
+        <p14:creationId xmlns:p14="http://schemas.microsoft.com/office/powerpoint/2010/main" val="1704560547"/>
+      </p:ext>
+    </p:extLst>
+  </p:cSld>
+  <p:clrMapOvr>
+    <a:masterClrMapping/>
+  </p:clrMapOvr>
+</p:sld>
+</file>
+
+<file path=ppt/slides/slide16.xml><?xml version="1.0" encoding="utf-8"?>
+<p:sld xmlns:a="http://schemas.openxmlformats.org/drawingml/2006/main" xmlns:r="http://schemas.openxmlformats.org/officeDocument/2006/relationships" xmlns:p="http://schemas.openxmlformats.org/presentationml/2006/main">
+  <p:cSld>
+    <p:spTree>
+      <p:nvGrpSpPr>
+        <p:cNvPr id="1" name="">
+          <a:extLst>
+            <a:ext uri="{FF2B5EF4-FFF2-40B4-BE49-F238E27FC236}">
+              <a16:creationId xmlns:a16="http://schemas.microsoft.com/office/drawing/2014/main" id="{873B0F53-6EEB-245C-6AD7-D2E4656CDF1A}"/>
+            </a:ext>
+          </a:extLst>
+        </p:cNvPr>
+        <p:cNvGrpSpPr/>
+        <p:nvPr/>
+      </p:nvGrpSpPr>
+      <p:grpSpPr>
+        <a:xfrm>
+          <a:off x="0" y="0"/>
+          <a:ext cx="0" cy="0"/>
+          <a:chOff x="0" y="0"/>
+          <a:chExt cx="0" cy="0"/>
+        </a:xfrm>
+      </p:grpSpPr>
+      <p:sp>
+        <p:nvSpPr>
+          <p:cNvPr id="5" name="內容版面配置區 4">
+            <a:extLst>
+              <a:ext uri="{FF2B5EF4-FFF2-40B4-BE49-F238E27FC236}">
+                <a16:creationId xmlns:a16="http://schemas.microsoft.com/office/drawing/2014/main" id="{CC57A021-31B2-633F-D32F-30B5CC3D9604}"/>
+              </a:ext>
+            </a:extLst>
+          </p:cNvPr>
+          <p:cNvSpPr>
+            <a:spLocks noGrp="1"/>
+          </p:cNvSpPr>
+          <p:nvPr>
+            <p:ph idx="1"/>
+          </p:nvPr>
+        </p:nvSpPr>
+        <p:spPr>
+          <a:xfrm>
+            <a:off x="0" y="2084851"/>
+            <a:ext cx="12192000" cy="2404863"/>
+          </a:xfrm>
+        </p:spPr>
+        <p:txBody>
+          <a:bodyPr anchor="ctr">
+            <a:normAutofit/>
+          </a:bodyPr>
+          <a:lstStyle/>
+          <a:p>
+            <a:pPr marL="0" indent="0" algn="ctr">
+              <a:buNone/>
+            </a:pPr>
+            <a:r>
+              <a:rPr lang="zh-TW" altLang="en-US" sz="6400" b="1" dirty="0">
+                <a:solidFill>
+                  <a:srgbClr val="660033"/>
+                </a:solidFill>
+                <a:latin typeface="Microsoft JhengHei" pitchFamily="34" charset="-120"/>
+                <a:ea typeface="Microsoft JhengHei" pitchFamily="34" charset="-120"/>
+              </a:rPr>
+              <a:t>大家齊步奔往聖山</a:t>
+            </a:r>
+          </a:p>
+          <a:p>
+            <a:pPr marL="0" indent="0" algn="ctr">
+              <a:buNone/>
+            </a:pPr>
+            <a:r>
+              <a:rPr lang="zh-TW" altLang="en-US" sz="6400" b="1" dirty="0">
+                <a:solidFill>
+                  <a:srgbClr val="660033"/>
+                </a:solidFill>
+                <a:latin typeface="Microsoft JhengHei" pitchFamily="34" charset="-120"/>
+                <a:ea typeface="Microsoft JhengHei" pitchFamily="34" charset="-120"/>
+              </a:rPr>
+              <a:t>仰望那佳美之聖城</a:t>
+            </a:r>
+          </a:p>
+        </p:txBody>
+      </p:sp>
+    </p:spTree>
+    <p:extLst>
+      <p:ext uri="{BB962C8B-B14F-4D97-AF65-F5344CB8AC3E}">
+        <p14:creationId xmlns:p14="http://schemas.microsoft.com/office/powerpoint/2010/main" val="1048487911"/>
+      </p:ext>
+    </p:extLst>
+  </p:cSld>
+  <p:clrMapOvr>
+    <a:masterClrMapping/>
+  </p:clrMapOvr>
+</p:sld>
+</file>
+
+<file path=ppt/slides/slide17.xml><?xml version="1.0" encoding="utf-8"?>
+<p:sld xmlns:a="http://schemas.openxmlformats.org/drawingml/2006/main" xmlns:r="http://schemas.openxmlformats.org/officeDocument/2006/relationships" xmlns:p="http://schemas.openxmlformats.org/presentationml/2006/main">
+  <p:cSld>
+    <p:spTree>
+      <p:nvGrpSpPr>
+        <p:cNvPr id="1" name="">
+          <a:extLst>
+            <a:ext uri="{FF2B5EF4-FFF2-40B4-BE49-F238E27FC236}">
+              <a16:creationId xmlns:a16="http://schemas.microsoft.com/office/drawing/2014/main" id="{C80AB7B0-272E-F0FE-8C94-8D1FEC889F37}"/>
+            </a:ext>
+          </a:extLst>
+        </p:cNvPr>
+        <p:cNvGrpSpPr/>
+        <p:nvPr/>
+      </p:nvGrpSpPr>
+      <p:grpSpPr>
+        <a:xfrm>
+          <a:off x="0" y="0"/>
+          <a:ext cx="0" cy="0"/>
+          <a:chOff x="0" y="0"/>
+          <a:chExt cx="0" cy="0"/>
+        </a:xfrm>
+      </p:grpSpPr>
+      <p:sp>
+        <p:nvSpPr>
+          <p:cNvPr id="5" name="內容版面配置區 4">
+            <a:extLst>
+              <a:ext uri="{FF2B5EF4-FFF2-40B4-BE49-F238E27FC236}">
+                <a16:creationId xmlns:a16="http://schemas.microsoft.com/office/drawing/2014/main" id="{3E8278E8-2E2E-62B8-CA97-CB798622BE0D}"/>
+              </a:ext>
+            </a:extLst>
+          </p:cNvPr>
+          <p:cNvSpPr>
+            <a:spLocks noGrp="1"/>
+          </p:cNvSpPr>
+          <p:nvPr>
+            <p:ph idx="1"/>
+          </p:nvPr>
+        </p:nvSpPr>
+        <p:spPr>
+          <a:xfrm>
+            <a:off x="0" y="2084851"/>
+            <a:ext cx="12192000" cy="2404863"/>
+          </a:xfrm>
+        </p:spPr>
+        <p:txBody>
+          <a:bodyPr anchor="ctr">
+            <a:normAutofit/>
+          </a:bodyPr>
+          <a:lstStyle/>
+          <a:p>
+            <a:pPr marL="0" indent="0" algn="ctr">
+              <a:buNone/>
+            </a:pPr>
+            <a:r>
+              <a:rPr lang="zh-TW" altLang="en-US" sz="6400" b="1" dirty="0">
+                <a:solidFill>
+                  <a:srgbClr val="660033"/>
+                </a:solidFill>
+                <a:latin typeface="Microsoft JhengHei" pitchFamily="34" charset="-120"/>
+                <a:ea typeface="Microsoft JhengHei" pitchFamily="34" charset="-120"/>
+              </a:rPr>
+              <a:t>故此歡樂無窮</a:t>
+            </a:r>
+            <a:endParaRPr lang="en-US" altLang="zh-TW" sz="6400" b="1" dirty="0">
+              <a:solidFill>
+                <a:srgbClr val="660033"/>
+              </a:solidFill>
+              <a:latin typeface="Microsoft JhengHei" pitchFamily="34" charset="-120"/>
+              <a:ea typeface="Microsoft JhengHei" pitchFamily="34" charset="-120"/>
+            </a:endParaRPr>
+          </a:p>
+          <a:p>
+            <a:pPr marL="0" indent="0" algn="ctr">
+              <a:buNone/>
+            </a:pPr>
+            <a:r>
+              <a:rPr lang="zh-TW" altLang="en-US" sz="6400" b="1" dirty="0">
+                <a:solidFill>
+                  <a:srgbClr val="660033"/>
+                </a:solidFill>
+                <a:latin typeface="Microsoft JhengHei" pitchFamily="34" charset="-120"/>
+                <a:ea typeface="Microsoft JhengHei" pitchFamily="34" charset="-120"/>
+              </a:rPr>
+              <a:t>我眼淚都擦淨</a:t>
+            </a:r>
+          </a:p>
+        </p:txBody>
+      </p:sp>
+      <p:sp>
+        <p:nvSpPr>
+          <p:cNvPr id="3" name="TextBox 2">
+            <a:extLst>
+              <a:ext uri="{FF2B5EF4-FFF2-40B4-BE49-F238E27FC236}">
+                <a16:creationId xmlns:a16="http://schemas.microsoft.com/office/drawing/2014/main" id="{8484BC7C-5CEF-2BED-C327-24E3E5783CA2}"/>
+              </a:ext>
+            </a:extLst>
+          </p:cNvPr>
+          <p:cNvSpPr txBox="1"/>
+          <p:nvPr/>
+        </p:nvSpPr>
+        <p:spPr>
+          <a:xfrm>
+            <a:off x="0" y="5061182"/>
+            <a:ext cx="12192000" cy="646331"/>
+          </a:xfrm>
+          <a:prstGeom prst="rect">
+            <a:avLst/>
+          </a:prstGeom>
+          <a:noFill/>
+        </p:spPr>
+        <p:txBody>
+          <a:bodyPr wrap="square" rtlCol="0">
+            <a:spAutoFit/>
+          </a:bodyPr>
+          <a:lstStyle/>
+          <a:p>
+            <a:pPr algn="ctr"/>
+            <a:r>
+              <a:rPr lang="en-US" sz="3600" b="1" dirty="0">
+                <a:solidFill>
+                  <a:srgbClr val="660033"/>
+                </a:solidFill>
+              </a:rPr>
+              <a:t>( 4 / 4 )</a:t>
+            </a:r>
+            <a:endParaRPr lang="vi-VN" sz="3600" b="1" dirty="0">
+              <a:solidFill>
+                <a:srgbClr val="660033"/>
+              </a:solidFill>
+            </a:endParaRPr>
+          </a:p>
+        </p:txBody>
+      </p:sp>
+    </p:spTree>
+    <p:extLst>
+      <p:ext uri="{BB962C8B-B14F-4D97-AF65-F5344CB8AC3E}">
+        <p14:creationId xmlns:p14="http://schemas.microsoft.com/office/powerpoint/2010/main" val="1200570333"/>
+      </p:ext>
+    </p:extLst>
+  </p:cSld>
+  <p:clrMapOvr>
+    <a:masterClrMapping/>
+  </p:clrMapOvr>
+</p:sld>
+</file>
+
+<file path=ppt/slides/slide18.xml><?xml version="1.0" encoding="utf-8"?>
+<p:sld xmlns:a="http://schemas.openxmlformats.org/drawingml/2006/main" xmlns:r="http://schemas.openxmlformats.org/officeDocument/2006/relationships" xmlns:p="http://schemas.openxmlformats.org/presentationml/2006/main">
+  <p:cSld>
+    <p:spTree>
+      <p:nvGrpSpPr>
+        <p:cNvPr id="1" name="">
+          <a:extLst>
+            <a:ext uri="{FF2B5EF4-FFF2-40B4-BE49-F238E27FC236}">
+              <a16:creationId xmlns:a16="http://schemas.microsoft.com/office/drawing/2014/main" id="{B130FB71-5E9D-1DC1-1A3D-5B11823D1B03}"/>
+            </a:ext>
+          </a:extLst>
+        </p:cNvPr>
+        <p:cNvGrpSpPr/>
+        <p:nvPr/>
+      </p:nvGrpSpPr>
+      <p:grpSpPr>
+        <a:xfrm>
+          <a:off x="0" y="0"/>
+          <a:ext cx="0" cy="0"/>
+          <a:chOff x="0" y="0"/>
+          <a:chExt cx="0" cy="0"/>
+        </a:xfrm>
+      </p:grpSpPr>
+      <p:sp>
+        <p:nvSpPr>
+          <p:cNvPr id="5" name="內容版面配置區 4">
+            <a:extLst>
+              <a:ext uri="{FF2B5EF4-FFF2-40B4-BE49-F238E27FC236}">
+                <a16:creationId xmlns:a16="http://schemas.microsoft.com/office/drawing/2014/main" id="{ACF04BB7-8C0E-78ED-F045-72071A938ED2}"/>
+              </a:ext>
+            </a:extLst>
+          </p:cNvPr>
+          <p:cNvSpPr>
+            <a:spLocks noGrp="1"/>
+          </p:cNvSpPr>
+          <p:nvPr>
+            <p:ph idx="1"/>
+          </p:nvPr>
+        </p:nvSpPr>
+        <p:spPr>
+          <a:xfrm>
+            <a:off x="0" y="2084851"/>
+            <a:ext cx="12192000" cy="2404863"/>
+          </a:xfrm>
+        </p:spPr>
+        <p:txBody>
+          <a:bodyPr anchor="ctr">
+            <a:normAutofit/>
+          </a:bodyPr>
+          <a:lstStyle/>
+          <a:p>
+            <a:pPr marL="0" indent="0" algn="ctr">
+              <a:buNone/>
+            </a:pPr>
+            <a:r>
+              <a:rPr lang="zh-TW" altLang="en-US" sz="6400" b="1" dirty="0">
+                <a:solidFill>
+                  <a:srgbClr val="660033"/>
+                </a:solidFill>
+                <a:latin typeface="Microsoft JhengHei" pitchFamily="34" charset="-120"/>
+                <a:ea typeface="Microsoft JhengHei" pitchFamily="34" charset="-120"/>
+              </a:rPr>
+              <a:t>前面榮光就是明宮</a:t>
+            </a:r>
+          </a:p>
+          <a:p>
+            <a:pPr marL="0" indent="0" algn="ctr">
+              <a:buNone/>
+            </a:pPr>
+            <a:r>
+              <a:rPr lang="zh-TW" altLang="en-US" sz="6400" b="1" dirty="0">
+                <a:solidFill>
+                  <a:srgbClr val="660033"/>
+                </a:solidFill>
+                <a:latin typeface="Microsoft JhengHei" pitchFamily="34" charset="-120"/>
+                <a:ea typeface="Microsoft JhengHei" pitchFamily="34" charset="-120"/>
+              </a:rPr>
+              <a:t>前面榮光就是明宮</a:t>
+            </a:r>
+          </a:p>
+        </p:txBody>
+      </p:sp>
+      <p:sp>
+        <p:nvSpPr>
+          <p:cNvPr id="3" name="TextBox 2">
+            <a:extLst>
+              <a:ext uri="{FF2B5EF4-FFF2-40B4-BE49-F238E27FC236}">
+                <a16:creationId xmlns:a16="http://schemas.microsoft.com/office/drawing/2014/main" id="{2B49E700-2170-5B21-FBFC-F068A9812AF6}"/>
+              </a:ext>
+            </a:extLst>
+          </p:cNvPr>
+          <p:cNvSpPr txBox="1"/>
+          <p:nvPr/>
+        </p:nvSpPr>
+        <p:spPr>
+          <a:xfrm>
+            <a:off x="0" y="5061182"/>
+            <a:ext cx="12192000" cy="646331"/>
+          </a:xfrm>
+          <a:prstGeom prst="rect">
+            <a:avLst/>
+          </a:prstGeom>
+          <a:noFill/>
+        </p:spPr>
+        <p:txBody>
+          <a:bodyPr wrap="square" rtlCol="0">
+            <a:spAutoFit/>
+          </a:bodyPr>
+          <a:lstStyle/>
+          <a:p>
+            <a:pPr algn="ctr"/>
+            <a:r>
+              <a:rPr lang="en-US" sz="3600" b="1" dirty="0">
+                <a:solidFill>
+                  <a:srgbClr val="660033"/>
+                </a:solidFill>
+              </a:rPr>
+              <a:t>( 4 / 4 )</a:t>
+            </a:r>
+            <a:endParaRPr lang="vi-VN" sz="3600" b="1" dirty="0">
+              <a:solidFill>
+                <a:srgbClr val="660033"/>
+              </a:solidFill>
+            </a:endParaRPr>
+          </a:p>
+        </p:txBody>
+      </p:sp>
+    </p:spTree>
+    <p:extLst>
+      <p:ext uri="{BB962C8B-B14F-4D97-AF65-F5344CB8AC3E}">
+        <p14:creationId xmlns:p14="http://schemas.microsoft.com/office/powerpoint/2010/main" val="1482446023"/>
+      </p:ext>
+    </p:extLst>
+  </p:cSld>
+  <p:clrMapOvr>
+    <a:masterClrMapping/>
+  </p:clrMapOvr>
+</p:sld>
+</file>
+
+<file path=ppt/slides/slide19.xml><?xml version="1.0" encoding="utf-8"?>
+<p:sld xmlns:a="http://schemas.openxmlformats.org/drawingml/2006/main" xmlns:r="http://schemas.openxmlformats.org/officeDocument/2006/relationships" xmlns:p="http://schemas.openxmlformats.org/presentationml/2006/main">
+  <p:cSld>
+    <p:spTree>
+      <p:nvGrpSpPr>
+        <p:cNvPr id="1" name="">
+          <a:extLst>
+            <a:ext uri="{FF2B5EF4-FFF2-40B4-BE49-F238E27FC236}">
+              <a16:creationId xmlns:a16="http://schemas.microsoft.com/office/drawing/2014/main" id="{BCDEE17E-769B-591A-F42A-0B30FF178195}"/>
+            </a:ext>
+          </a:extLst>
+        </p:cNvPr>
+        <p:cNvGrpSpPr/>
+        <p:nvPr/>
+      </p:nvGrpSpPr>
+      <p:grpSpPr>
+        <a:xfrm>
+          <a:off x="0" y="0"/>
+          <a:ext cx="0" cy="0"/>
+          <a:chOff x="0" y="0"/>
+          <a:chExt cx="0" cy="0"/>
+        </a:xfrm>
+      </p:grpSpPr>
+      <p:sp>
+        <p:nvSpPr>
+          <p:cNvPr id="5" name="內容版面配置區 4">
+            <a:extLst>
+              <a:ext uri="{FF2B5EF4-FFF2-40B4-BE49-F238E27FC236}">
+                <a16:creationId xmlns:a16="http://schemas.microsoft.com/office/drawing/2014/main" id="{1F966E1A-066D-4D73-1B3E-CA86F29FE88C}"/>
+              </a:ext>
+            </a:extLst>
+          </p:cNvPr>
+          <p:cNvSpPr>
+            <a:spLocks noGrp="1"/>
+          </p:cNvSpPr>
+          <p:nvPr>
+            <p:ph idx="1"/>
+          </p:nvPr>
+        </p:nvSpPr>
+        <p:spPr>
+          <a:xfrm>
+            <a:off x="0" y="2084851"/>
+            <a:ext cx="12192000" cy="2404863"/>
+          </a:xfrm>
+        </p:spPr>
+        <p:txBody>
+          <a:bodyPr anchor="ctr">
+            <a:normAutofit/>
+          </a:bodyPr>
+          <a:lstStyle/>
+          <a:p>
+            <a:pPr marL="0" indent="0" algn="ctr">
+              <a:buNone/>
+            </a:pPr>
+            <a:r>
+              <a:rPr lang="zh-TW" altLang="en-US" sz="6400" b="1" dirty="0">
+                <a:solidFill>
+                  <a:srgbClr val="660033"/>
+                </a:solidFill>
+                <a:latin typeface="Microsoft JhengHei" pitchFamily="34" charset="-120"/>
+                <a:ea typeface="Microsoft JhengHei" pitchFamily="34" charset="-120"/>
+              </a:rPr>
+              <a:t>過片時到樂境</a:t>
+            </a:r>
+            <a:endParaRPr lang="en-US" altLang="zh-TW" sz="6400" b="1" dirty="0">
+              <a:solidFill>
+                <a:srgbClr val="660033"/>
+              </a:solidFill>
+              <a:latin typeface="Microsoft JhengHei" pitchFamily="34" charset="-120"/>
+              <a:ea typeface="Microsoft JhengHei" pitchFamily="34" charset="-120"/>
+            </a:endParaRPr>
+          </a:p>
+          <a:p>
+            <a:pPr marL="0" indent="0" algn="ctr">
+              <a:buNone/>
+            </a:pPr>
+            <a:r>
+              <a:rPr lang="zh-TW" altLang="en-US" sz="6400" b="1" dirty="0">
+                <a:solidFill>
+                  <a:srgbClr val="660033"/>
+                </a:solidFill>
+                <a:latin typeface="Microsoft JhengHei" pitchFamily="34" charset="-120"/>
+                <a:ea typeface="Microsoft JhengHei" pitchFamily="34" charset="-120"/>
+              </a:rPr>
+              <a:t>過片時到樂境</a:t>
+            </a:r>
+          </a:p>
+        </p:txBody>
+      </p:sp>
+      <p:sp>
+        <p:nvSpPr>
+          <p:cNvPr id="3" name="TextBox 2">
+            <a:extLst>
+              <a:ext uri="{FF2B5EF4-FFF2-40B4-BE49-F238E27FC236}">
+                <a16:creationId xmlns:a16="http://schemas.microsoft.com/office/drawing/2014/main" id="{E1E4066E-3DDC-03D7-CDAF-6D7A9C0C42A2}"/>
+              </a:ext>
+            </a:extLst>
+          </p:cNvPr>
+          <p:cNvSpPr txBox="1"/>
+          <p:nvPr/>
+        </p:nvSpPr>
+        <p:spPr>
+          <a:xfrm>
+            <a:off x="0" y="5061182"/>
+            <a:ext cx="12192000" cy="646331"/>
+          </a:xfrm>
+          <a:prstGeom prst="rect">
+            <a:avLst/>
+          </a:prstGeom>
+          <a:noFill/>
+        </p:spPr>
+        <p:txBody>
+          <a:bodyPr wrap="square" rtlCol="0">
+            <a:spAutoFit/>
+          </a:bodyPr>
+          <a:lstStyle/>
+          <a:p>
+            <a:pPr algn="ctr"/>
+            <a:r>
+              <a:rPr lang="en-US" sz="3600" b="1" dirty="0">
+                <a:solidFill>
+                  <a:srgbClr val="660033"/>
+                </a:solidFill>
+              </a:rPr>
+              <a:t>( 4 / 4 )</a:t>
+            </a:r>
+            <a:endParaRPr lang="vi-VN" sz="3600" b="1" dirty="0">
+              <a:solidFill>
+                <a:srgbClr val="660033"/>
+              </a:solidFill>
+            </a:endParaRPr>
+          </a:p>
+        </p:txBody>
+      </p:sp>
+    </p:spTree>
+    <p:extLst>
+      <p:ext uri="{BB962C8B-B14F-4D97-AF65-F5344CB8AC3E}">
+        <p14:creationId xmlns:p14="http://schemas.microsoft.com/office/powerpoint/2010/main" val="1809036727"/>
+      </p:ext>
+    </p:extLst>
   </p:cSld>
   <p:clrMapOvr>
     <a:masterClrMapping/>
@@ -3369,197 +4464,289 @@
         </p:nvSpPr>
         <p:spPr>
           <a:xfrm>
-            <a:off x="0" y="242902"/>
-            <a:ext cx="9144000" cy="5257800"/>
+            <a:off x="0" y="2084851"/>
+            <a:ext cx="12192000" cy="2404863"/>
           </a:xfrm>
         </p:spPr>
         <p:txBody>
-          <a:bodyPr>
+          <a:bodyPr anchor="ctr">
             <a:normAutofit/>
           </a:bodyPr>
           <a:lstStyle/>
           <a:p>
-            <a:pPr algn="ctr">
+            <a:pPr marL="0" indent="0" algn="ctr">
               <a:buNone/>
             </a:pPr>
             <a:r>
-              <a:rPr lang="zh-TW" altLang="en-US" sz="5400" b="1" dirty="0" smtClean="0">
-                <a:solidFill>
-                  <a:srgbClr val="000066"/>
-                </a:solidFill>
-                <a:latin typeface="微軟正黑體" pitchFamily="34" charset="-120"/>
-                <a:ea typeface="微軟正黑體" pitchFamily="34" charset="-120"/>
+              <a:rPr lang="zh-TW" altLang="en-US" sz="6400" b="1" dirty="0">
+                <a:solidFill>
+                  <a:srgbClr val="660033"/>
+                </a:solidFill>
+                <a:latin typeface="Microsoft JhengHei" pitchFamily="34" charset="-120"/>
+                <a:ea typeface="Microsoft JhengHei" pitchFamily="34" charset="-120"/>
               </a:rPr>
-              <a:t>今同心往聖山</a:t>
-            </a:r>
-            <a:endParaRPr lang="en-US" altLang="zh-TW" sz="5400" b="1" dirty="0" smtClean="0">
+              <a:t>凡敬愛主的人  </a:t>
+            </a:r>
+            <a:endParaRPr lang="en-US" altLang="zh-TW" sz="6400" b="1" dirty="0">
               <a:solidFill>
-                <a:srgbClr val="000066"/>
+                <a:srgbClr val="660033"/>
               </a:solidFill>
-              <a:latin typeface="微軟正黑體" pitchFamily="34" charset="-120"/>
-              <a:ea typeface="微軟正黑體" pitchFamily="34" charset="-120"/>
+              <a:latin typeface="Microsoft JhengHei" pitchFamily="34" charset="-120"/>
+              <a:ea typeface="Microsoft JhengHei" pitchFamily="34" charset="-120"/>
             </a:endParaRPr>
           </a:p>
           <a:p>
-            <a:pPr algn="ctr">
+            <a:pPr marL="0" indent="0" algn="ctr">
               <a:buNone/>
             </a:pPr>
             <a:r>
-              <a:rPr lang="zh-TW" altLang="en-US" sz="5400" b="1" dirty="0" smtClean="0">
-                <a:solidFill>
-                  <a:srgbClr val="000066"/>
-                </a:solidFill>
-                <a:latin typeface="微軟正黑體" pitchFamily="34" charset="-120"/>
-                <a:ea typeface="微軟正黑體" pitchFamily="34" charset="-120"/>
+              <a:rPr lang="zh-TW" altLang="en-US" sz="6400" b="1" dirty="0">
+                <a:solidFill>
+                  <a:srgbClr val="660033"/>
+                </a:solidFill>
+                <a:latin typeface="Microsoft JhengHei" pitchFamily="34" charset="-120"/>
+                <a:ea typeface="Microsoft JhengHei" pitchFamily="34" charset="-120"/>
               </a:rPr>
-              <a:t>就是那佳美之錫安</a:t>
-            </a:r>
-            <a:endParaRPr lang="en-US" altLang="zh-TW" sz="5400" b="1" dirty="0" smtClean="0">
-              <a:solidFill>
-                <a:srgbClr val="000066"/>
-              </a:solidFill>
-              <a:latin typeface="微軟正黑體" pitchFamily="34" charset="-120"/>
-              <a:ea typeface="微軟正黑體" pitchFamily="34" charset="-120"/>
-            </a:endParaRPr>
-          </a:p>
-          <a:p>
-            <a:pPr algn="ctr">
-              <a:buNone/>
-            </a:pPr>
-            <a:r>
-              <a:rPr lang="zh-TW" altLang="en-US" sz="5400" b="1" dirty="0" smtClean="0">
-                <a:solidFill>
-                  <a:srgbClr val="000066"/>
-                </a:solidFill>
-                <a:latin typeface="微軟正黑體" pitchFamily="34" charset="-120"/>
-                <a:ea typeface="微軟正黑體" pitchFamily="34" charset="-120"/>
-              </a:rPr>
-              <a:t>大家齊步奔往聖山</a:t>
-            </a:r>
-            <a:endParaRPr lang="en-US" altLang="zh-TW" sz="5400" b="1" dirty="0" smtClean="0">
-              <a:solidFill>
-                <a:srgbClr val="000066"/>
-              </a:solidFill>
-              <a:latin typeface="微軟正黑體" pitchFamily="34" charset="-120"/>
-              <a:ea typeface="微軟正黑體" pitchFamily="34" charset="-120"/>
-            </a:endParaRPr>
-          </a:p>
-          <a:p>
-            <a:pPr algn="ctr">
-              <a:buNone/>
-            </a:pPr>
-            <a:r>
-              <a:rPr lang="zh-TW" altLang="en-US" sz="5400" b="1" dirty="0" smtClean="0">
-                <a:solidFill>
-                  <a:srgbClr val="000066"/>
-                </a:solidFill>
-                <a:latin typeface="微軟正黑體" pitchFamily="34" charset="-120"/>
-                <a:ea typeface="微軟正黑體" pitchFamily="34" charset="-120"/>
-              </a:rPr>
-              <a:t>仰望那佳美之聖城</a:t>
-            </a:r>
-            <a:endParaRPr lang="zh-TW" altLang="en-US" sz="5400" b="1" dirty="0">
-              <a:solidFill>
-                <a:srgbClr val="000066"/>
-              </a:solidFill>
-              <a:latin typeface="微軟正黑體" pitchFamily="34" charset="-120"/>
-              <a:ea typeface="微軟正黑體" pitchFamily="34" charset="-120"/>
-            </a:endParaRPr>
-          </a:p>
-        </p:txBody>
-      </p:sp>
-      <p:sp>
-        <p:nvSpPr>
-          <p:cNvPr id="6" name="標題 3"/>
-          <p:cNvSpPr txBox="1">
-            <a:spLocks/>
-          </p:cNvSpPr>
+              <a:t>可歡然來讚美</a:t>
+            </a:r>
+          </a:p>
+        </p:txBody>
+      </p:sp>
+      <p:sp>
+        <p:nvSpPr>
+          <p:cNvPr id="3" name="TextBox 2"/>
+          <p:cNvSpPr txBox="1"/>
           <p:nvPr/>
         </p:nvSpPr>
         <p:spPr>
           <a:xfrm>
-            <a:off x="0" y="6429396"/>
-            <a:ext cx="1357290" cy="428604"/>
+            <a:off x="0" y="5061182"/>
+            <a:ext cx="12192000" cy="646331"/>
           </a:xfrm>
           <a:prstGeom prst="rect">
             <a:avLst/>
           </a:prstGeom>
+          <a:noFill/>
         </p:spPr>
         <p:txBody>
-          <a:bodyPr vert="horz" lIns="91440" tIns="45720" rIns="91440" bIns="45720" rtlCol="0" anchor="ctr">
+          <a:bodyPr wrap="square" rtlCol="0">
+            <a:spAutoFit/>
+          </a:bodyPr>
+          <a:lstStyle/>
+          <a:p>
+            <a:pPr algn="ctr"/>
+            <a:r>
+              <a:rPr lang="en-US" sz="3600" b="1" dirty="0">
+                <a:solidFill>
+                  <a:srgbClr val="660033"/>
+                </a:solidFill>
+              </a:rPr>
+              <a:t>( 1 / 4 )</a:t>
+            </a:r>
+            <a:endParaRPr lang="vi-VN" sz="3600" b="1" dirty="0">
+              <a:solidFill>
+                <a:srgbClr val="660033"/>
+              </a:solidFill>
+            </a:endParaRPr>
+          </a:p>
+        </p:txBody>
+      </p:sp>
+    </p:spTree>
+    <p:extLst>
+      <p:ext uri="{BB962C8B-B14F-4D97-AF65-F5344CB8AC3E}">
+        <p14:creationId xmlns:p14="http://schemas.microsoft.com/office/powerpoint/2010/main" val="1407003638"/>
+      </p:ext>
+    </p:extLst>
+  </p:cSld>
+  <p:clrMapOvr>
+    <a:masterClrMapping/>
+  </p:clrMapOvr>
+</p:sld>
+</file>
+
+<file path=ppt/slides/slide20.xml><?xml version="1.0" encoding="utf-8"?>
+<p:sld xmlns:a="http://schemas.openxmlformats.org/drawingml/2006/main" xmlns:r="http://schemas.openxmlformats.org/officeDocument/2006/relationships" xmlns:p="http://schemas.openxmlformats.org/presentationml/2006/main">
+  <p:cSld>
+    <p:spTree>
+      <p:nvGrpSpPr>
+        <p:cNvPr id="1" name="">
+          <a:extLst>
+            <a:ext uri="{FF2B5EF4-FFF2-40B4-BE49-F238E27FC236}">
+              <a16:creationId xmlns:a16="http://schemas.microsoft.com/office/drawing/2014/main" id="{5CA30071-43CF-E0DA-3CA4-9C90AF69FFA4}"/>
+            </a:ext>
+          </a:extLst>
+        </p:cNvPr>
+        <p:cNvGrpSpPr/>
+        <p:nvPr/>
+      </p:nvGrpSpPr>
+      <p:grpSpPr>
+        <a:xfrm>
+          <a:off x="0" y="0"/>
+          <a:ext cx="0" cy="0"/>
+          <a:chOff x="0" y="0"/>
+          <a:chExt cx="0" cy="0"/>
+        </a:xfrm>
+      </p:grpSpPr>
+      <p:sp>
+        <p:nvSpPr>
+          <p:cNvPr id="5" name="內容版面配置區 4">
+            <a:extLst>
+              <a:ext uri="{FF2B5EF4-FFF2-40B4-BE49-F238E27FC236}">
+                <a16:creationId xmlns:a16="http://schemas.microsoft.com/office/drawing/2014/main" id="{8C4F73A3-0B3B-5356-EF80-81D5909EE02B}"/>
+              </a:ext>
+            </a:extLst>
+          </p:cNvPr>
+          <p:cNvSpPr>
+            <a:spLocks noGrp="1"/>
+          </p:cNvSpPr>
+          <p:nvPr>
+            <p:ph idx="1"/>
+          </p:nvPr>
+        </p:nvSpPr>
+        <p:spPr>
+          <a:xfrm>
+            <a:off x="0" y="2084851"/>
+            <a:ext cx="12192000" cy="2404863"/>
+          </a:xfrm>
+        </p:spPr>
+        <p:txBody>
+          <a:bodyPr anchor="ctr">
             <a:normAutofit/>
           </a:bodyPr>
           <a:lstStyle/>
           <a:p>
-            <a:pPr marL="0" marR="0" lvl="0" indent="0" algn="ctr" defTabSz="914400" rtl="0" eaLnBrk="1" fontAlgn="auto" latinLnBrk="0" hangingPunct="1">
-              <a:lnSpc>
-                <a:spcPct val="100000"/>
-              </a:lnSpc>
-              <a:spcBef>
-                <a:spcPct val="0"/>
-              </a:spcBef>
-              <a:spcAft>
-                <a:spcPts val="0"/>
-              </a:spcAft>
-              <a:buClrTx/>
-              <a:buSzTx/>
-              <a:buFontTx/>
-              <a:buNone/>
-              <a:tabLst/>
-              <a:defRPr/>
+            <a:pPr marL="0" indent="0" algn="ctr">
+              <a:buNone/>
             </a:pPr>
             <a:r>
-              <a:rPr kumimoji="0" lang="zh-TW" altLang="en-US" sz="1500" b="1" i="0" u="none" strike="noStrike" kern="1200" cap="none" spc="0" normalizeH="0" baseline="0" noProof="0" dirty="0" smtClean="0">
-                <a:ln>
-                  <a:noFill/>
-                </a:ln>
-                <a:solidFill>
-                  <a:srgbClr val="000066"/>
-                </a:solidFill>
-                <a:effectLst/>
-                <a:uLnTx/>
-                <a:uFillTx/>
-                <a:latin typeface="微軟正黑體" pitchFamily="34" charset="-120"/>
-                <a:ea typeface="微軟正黑體" pitchFamily="34" charset="-120"/>
-                <a:cs typeface="+mj-cs"/>
+              <a:rPr lang="zh-TW" altLang="en-US" sz="6400" b="1" dirty="0">
+                <a:solidFill>
+                  <a:srgbClr val="660033"/>
+                </a:solidFill>
+                <a:latin typeface="Microsoft JhengHei" pitchFamily="34" charset="-120"/>
+                <a:ea typeface="Microsoft JhengHei" pitchFamily="34" charset="-120"/>
               </a:rPr>
-              <a:t>往天行走</a:t>
-            </a:r>
-            <a:r>
-              <a:rPr kumimoji="0" lang="en-US" altLang="zh-CN" sz="1500" b="1" i="0" u="none" strike="noStrike" kern="1200" cap="none" spc="0" normalizeH="0" baseline="0" noProof="0" dirty="0" smtClean="0">
-                <a:ln>
-                  <a:noFill/>
-                </a:ln>
-                <a:solidFill>
-                  <a:srgbClr val="000066"/>
-                </a:solidFill>
-                <a:effectLst/>
-                <a:uLnTx/>
-                <a:uFillTx/>
-                <a:latin typeface="微軟正黑體" pitchFamily="34" charset="-120"/>
-                <a:ea typeface="微軟正黑體" pitchFamily="34" charset="-120"/>
-                <a:cs typeface="+mj-cs"/>
+              <a:t>今同心往聖山</a:t>
+            </a:r>
+          </a:p>
+          <a:p>
+            <a:pPr marL="0" indent="0" algn="ctr">
+              <a:buNone/>
+            </a:pPr>
+            <a:r>
+              <a:rPr lang="zh-TW" altLang="en-US" sz="6400" b="1" dirty="0">
+                <a:solidFill>
+                  <a:srgbClr val="660033"/>
+                </a:solidFill>
+                <a:latin typeface="Microsoft JhengHei" pitchFamily="34" charset="-120"/>
+                <a:ea typeface="Microsoft JhengHei" pitchFamily="34" charset="-120"/>
               </a:rPr>
-              <a:t>2/8</a:t>
-            </a:r>
-            <a:endParaRPr kumimoji="0" lang="zh-TW" altLang="en-US" sz="1500" b="0" i="0" u="none" strike="noStrike" kern="1200" cap="none" spc="0" normalizeH="0" baseline="0" noProof="0" dirty="0">
-              <a:ln>
-                <a:noFill/>
-              </a:ln>
-              <a:solidFill>
-                <a:srgbClr val="000066"/>
-              </a:solidFill>
-              <a:effectLst/>
-              <a:uLnTx/>
-              <a:uFillTx/>
-              <a:latin typeface="微軟正黑體" pitchFamily="34" charset="-120"/>
-              <a:ea typeface="微軟正黑體" pitchFamily="34" charset="-120"/>
-              <a:cs typeface="+mj-cs"/>
-            </a:endParaRPr>
+              <a:t>就是那佳美之錫安</a:t>
+            </a:r>
           </a:p>
         </p:txBody>
       </p:sp>
     </p:spTree>
+    <p:extLst>
+      <p:ext uri="{BB962C8B-B14F-4D97-AF65-F5344CB8AC3E}">
+        <p14:creationId xmlns:p14="http://schemas.microsoft.com/office/powerpoint/2010/main" val="327012583"/>
+      </p:ext>
+    </p:extLst>
+  </p:cSld>
+  <p:clrMapOvr>
+    <a:masterClrMapping/>
+  </p:clrMapOvr>
+</p:sld>
+</file>
+
+<file path=ppt/slides/slide21.xml><?xml version="1.0" encoding="utf-8"?>
+<p:sld xmlns:a="http://schemas.openxmlformats.org/drawingml/2006/main" xmlns:r="http://schemas.openxmlformats.org/officeDocument/2006/relationships" xmlns:p="http://schemas.openxmlformats.org/presentationml/2006/main">
+  <p:cSld>
+    <p:spTree>
+      <p:nvGrpSpPr>
+        <p:cNvPr id="1" name="">
+          <a:extLst>
+            <a:ext uri="{FF2B5EF4-FFF2-40B4-BE49-F238E27FC236}">
+              <a16:creationId xmlns:a16="http://schemas.microsoft.com/office/drawing/2014/main" id="{2F138A27-874A-20E6-9E13-CFD103A3F072}"/>
+            </a:ext>
+          </a:extLst>
+        </p:cNvPr>
+        <p:cNvGrpSpPr/>
+        <p:nvPr/>
+      </p:nvGrpSpPr>
+      <p:grpSpPr>
+        <a:xfrm>
+          <a:off x="0" y="0"/>
+          <a:ext cx="0" cy="0"/>
+          <a:chOff x="0" y="0"/>
+          <a:chExt cx="0" cy="0"/>
+        </a:xfrm>
+      </p:grpSpPr>
+      <p:sp>
+        <p:nvSpPr>
+          <p:cNvPr id="5" name="內容版面配置區 4">
+            <a:extLst>
+              <a:ext uri="{FF2B5EF4-FFF2-40B4-BE49-F238E27FC236}">
+                <a16:creationId xmlns:a16="http://schemas.microsoft.com/office/drawing/2014/main" id="{FF119E08-396D-619F-7D40-25D30FDE2786}"/>
+              </a:ext>
+            </a:extLst>
+          </p:cNvPr>
+          <p:cNvSpPr>
+            <a:spLocks noGrp="1"/>
+          </p:cNvSpPr>
+          <p:nvPr>
+            <p:ph idx="1"/>
+          </p:nvPr>
+        </p:nvSpPr>
+        <p:spPr>
+          <a:xfrm>
+            <a:off x="0" y="2084851"/>
+            <a:ext cx="12192000" cy="2404863"/>
+          </a:xfrm>
+        </p:spPr>
+        <p:txBody>
+          <a:bodyPr anchor="ctr">
+            <a:normAutofit/>
+          </a:bodyPr>
+          <a:lstStyle/>
+          <a:p>
+            <a:pPr marL="0" indent="0" algn="ctr">
+              <a:buNone/>
+            </a:pPr>
+            <a:r>
+              <a:rPr lang="zh-TW" altLang="en-US" sz="6400" b="1" dirty="0">
+                <a:solidFill>
+                  <a:srgbClr val="660033"/>
+                </a:solidFill>
+                <a:latin typeface="Microsoft JhengHei" pitchFamily="34" charset="-120"/>
+                <a:ea typeface="Microsoft JhengHei" pitchFamily="34" charset="-120"/>
+              </a:rPr>
+              <a:t>大家齊步奔往聖山</a:t>
+            </a:r>
+          </a:p>
+          <a:p>
+            <a:pPr marL="0" indent="0" algn="ctr">
+              <a:buNone/>
+            </a:pPr>
+            <a:r>
+              <a:rPr lang="zh-TW" altLang="en-US" sz="6400" b="1" dirty="0">
+                <a:solidFill>
+                  <a:srgbClr val="660033"/>
+                </a:solidFill>
+                <a:latin typeface="Microsoft JhengHei" pitchFamily="34" charset="-120"/>
+                <a:ea typeface="Microsoft JhengHei" pitchFamily="34" charset="-120"/>
+              </a:rPr>
+              <a:t>仰望那佳美之聖城</a:t>
+            </a:r>
+          </a:p>
+        </p:txBody>
+      </p:sp>
+    </p:spTree>
+    <p:extLst>
+      <p:ext uri="{BB962C8B-B14F-4D97-AF65-F5344CB8AC3E}">
+        <p14:creationId xmlns:p14="http://schemas.microsoft.com/office/powerpoint/2010/main" val="1328605199"/>
+      </p:ext>
+    </p:extLst>
   </p:cSld>
   <p:clrMapOvr>
     <a:masterClrMapping/>
@@ -3572,7 +4759,13 @@
   <p:cSld>
     <p:spTree>
       <p:nvGrpSpPr>
-        <p:cNvPr id="1" name=""/>
+        <p:cNvPr id="1" name="">
+          <a:extLst>
+            <a:ext uri="{FF2B5EF4-FFF2-40B4-BE49-F238E27FC236}">
+              <a16:creationId xmlns:a16="http://schemas.microsoft.com/office/drawing/2014/main" id="{46BAFE29-1411-4D1A-EC35-D1A4896BCC85}"/>
+            </a:ext>
+          </a:extLst>
+        </p:cNvPr>
         <p:cNvGrpSpPr/>
         <p:nvPr/>
       </p:nvGrpSpPr>
@@ -3586,7 +4779,13 @@
       </p:grpSpPr>
       <p:sp>
         <p:nvSpPr>
-          <p:cNvPr id="5" name="內容版面配置區 4"/>
+          <p:cNvPr id="5" name="內容版面配置區 4">
+            <a:extLst>
+              <a:ext uri="{FF2B5EF4-FFF2-40B4-BE49-F238E27FC236}">
+                <a16:creationId xmlns:a16="http://schemas.microsoft.com/office/drawing/2014/main" id="{FA35FBD4-92CD-FCEC-FBFF-C2839FAF2101}"/>
+              </a:ext>
+            </a:extLst>
+          </p:cNvPr>
           <p:cNvSpPr>
             <a:spLocks noGrp="1"/>
           </p:cNvSpPr>
@@ -3596,210 +4795,98 @@
         </p:nvSpPr>
         <p:spPr>
           <a:xfrm>
-            <a:off x="0" y="242902"/>
-            <a:ext cx="9144000" cy="5257800"/>
+            <a:off x="0" y="2084851"/>
+            <a:ext cx="12192000" cy="2404863"/>
           </a:xfrm>
         </p:spPr>
         <p:txBody>
-          <a:bodyPr>
+          <a:bodyPr anchor="ctr">
             <a:normAutofit/>
           </a:bodyPr>
           <a:lstStyle/>
           <a:p>
-            <a:pPr algn="ctr">
+            <a:pPr marL="0" indent="0" algn="ctr">
               <a:buNone/>
             </a:pPr>
             <a:r>
-              <a:rPr lang="zh-TW" altLang="en-US" sz="5400" b="1" dirty="0" smtClean="0">
-                <a:solidFill>
-                  <a:srgbClr val="000066"/>
-                </a:solidFill>
-                <a:latin typeface="微軟正黑體" pitchFamily="34" charset="-120"/>
-                <a:ea typeface="微軟正黑體" pitchFamily="34" charset="-120"/>
+              <a:rPr lang="zh-TW" altLang="en-US" sz="6400" b="1" dirty="0">
+                <a:solidFill>
+                  <a:srgbClr val="660033"/>
+                </a:solidFill>
+                <a:latin typeface="Microsoft JhengHei" pitchFamily="34" charset="-120"/>
+                <a:ea typeface="Microsoft JhengHei" pitchFamily="34" charset="-120"/>
               </a:rPr>
-              <a:t>若有人未識主</a:t>
-            </a:r>
-            <a:r>
-              <a:rPr lang="en-US" altLang="zh-TW" sz="5400" b="1" dirty="0" smtClean="0">
-                <a:solidFill>
-                  <a:srgbClr val="000066"/>
-                </a:solidFill>
-                <a:latin typeface="微軟正黑體" pitchFamily="34" charset="-120"/>
-                <a:ea typeface="微軟正黑體" pitchFamily="34" charset="-120"/>
+              <a:t>同心同聲頌揚主恩</a:t>
+            </a:r>
+          </a:p>
+          <a:p>
+            <a:pPr marL="0" indent="0" algn="ctr">
+              <a:buNone/>
+            </a:pPr>
+            <a:r>
+              <a:rPr lang="zh-TW" altLang="en-US" sz="6400" b="1" dirty="0">
+                <a:solidFill>
+                  <a:srgbClr val="660033"/>
+                </a:solidFill>
+                <a:latin typeface="Microsoft JhengHei" pitchFamily="34" charset="-120"/>
+                <a:ea typeface="Microsoft JhengHei" pitchFamily="34" charset="-120"/>
               </a:rPr>
-              <a:t>  </a:t>
-            </a:r>
-            <a:r>
-              <a:rPr lang="zh-TW" altLang="en-US" sz="5400" b="1" dirty="0" smtClean="0">
-                <a:solidFill>
-                  <a:srgbClr val="000066"/>
-                </a:solidFill>
-                <a:latin typeface="微軟正黑體" pitchFamily="34" charset="-120"/>
-                <a:ea typeface="微軟正黑體" pitchFamily="34" charset="-120"/>
-              </a:rPr>
-              <a:t>頌主自然無味</a:t>
-            </a:r>
-            <a:endParaRPr lang="en-US" altLang="zh-TW" sz="5400" b="1" dirty="0" smtClean="0">
-              <a:solidFill>
-                <a:srgbClr val="000066"/>
-              </a:solidFill>
-              <a:latin typeface="微軟正黑體" pitchFamily="34" charset="-120"/>
-              <a:ea typeface="微軟正黑體" pitchFamily="34" charset="-120"/>
-            </a:endParaRPr>
-          </a:p>
-          <a:p>
-            <a:pPr algn="ctr">
-              <a:buNone/>
-            </a:pPr>
-            <a:r>
-              <a:rPr lang="zh-TW" altLang="en-US" sz="5400" b="1" dirty="0" smtClean="0">
-                <a:solidFill>
-                  <a:srgbClr val="000066"/>
-                </a:solidFill>
-                <a:latin typeface="微軟正黑體" pitchFamily="34" charset="-120"/>
-                <a:ea typeface="微軟正黑體" pitchFamily="34" charset="-120"/>
-              </a:rPr>
-              <a:t>但全能主所收兒女</a:t>
-            </a:r>
-            <a:endParaRPr lang="en-US" altLang="zh-TW" sz="5400" b="1" dirty="0" smtClean="0">
-              <a:solidFill>
-                <a:srgbClr val="000066"/>
-              </a:solidFill>
-              <a:latin typeface="微軟正黑體" pitchFamily="34" charset="-120"/>
-              <a:ea typeface="微軟正黑體" pitchFamily="34" charset="-120"/>
-            </a:endParaRPr>
-          </a:p>
-          <a:p>
-            <a:pPr algn="ctr">
-              <a:buNone/>
-            </a:pPr>
-            <a:r>
-              <a:rPr lang="zh-TW" altLang="en-US" sz="5400" b="1" dirty="0" smtClean="0">
-                <a:solidFill>
-                  <a:srgbClr val="000066"/>
-                </a:solidFill>
-                <a:latin typeface="微軟正黑體" pitchFamily="34" charset="-120"/>
-                <a:ea typeface="微軟正黑體" pitchFamily="34" charset="-120"/>
-              </a:rPr>
-              <a:t>但全能主所收兒女</a:t>
-            </a:r>
-            <a:endParaRPr lang="en-US" altLang="zh-TW" sz="5400" b="1" dirty="0" smtClean="0">
-              <a:solidFill>
-                <a:srgbClr val="000066"/>
-              </a:solidFill>
-              <a:latin typeface="微軟正黑體" pitchFamily="34" charset="-120"/>
-              <a:ea typeface="微軟正黑體" pitchFamily="34" charset="-120"/>
-            </a:endParaRPr>
-          </a:p>
-          <a:p>
-            <a:pPr algn="ctr">
-              <a:buNone/>
-            </a:pPr>
-            <a:r>
-              <a:rPr lang="zh-TW" altLang="en-US" sz="5400" b="1" dirty="0" smtClean="0">
-                <a:solidFill>
-                  <a:srgbClr val="000066"/>
-                </a:solidFill>
-                <a:latin typeface="微軟正黑體" pitchFamily="34" charset="-120"/>
-                <a:ea typeface="微軟正黑體" pitchFamily="34" charset="-120"/>
-              </a:rPr>
-              <a:t>總要歡然讚美  總要歡然讚美</a:t>
-            </a:r>
-          </a:p>
-        </p:txBody>
-      </p:sp>
-      <p:sp>
-        <p:nvSpPr>
-          <p:cNvPr id="6" name="標題 3"/>
-          <p:cNvSpPr txBox="1">
-            <a:spLocks/>
-          </p:cNvSpPr>
+              <a:t>同心同聲頌揚主恩</a:t>
+            </a:r>
+          </a:p>
+        </p:txBody>
+      </p:sp>
+      <p:sp>
+        <p:nvSpPr>
+          <p:cNvPr id="3" name="TextBox 2">
+            <a:extLst>
+              <a:ext uri="{FF2B5EF4-FFF2-40B4-BE49-F238E27FC236}">
+                <a16:creationId xmlns:a16="http://schemas.microsoft.com/office/drawing/2014/main" id="{A3B68809-D02A-DA91-244B-10EF2FB37C2B}"/>
+              </a:ext>
+            </a:extLst>
+          </p:cNvPr>
+          <p:cNvSpPr txBox="1"/>
           <p:nvPr/>
         </p:nvSpPr>
         <p:spPr>
           <a:xfrm>
-            <a:off x="0" y="6429396"/>
-            <a:ext cx="1357290" cy="428604"/>
+            <a:off x="0" y="5061182"/>
+            <a:ext cx="12192000" cy="646331"/>
           </a:xfrm>
           <a:prstGeom prst="rect">
             <a:avLst/>
           </a:prstGeom>
+          <a:noFill/>
         </p:spPr>
         <p:txBody>
-          <a:bodyPr vert="horz" lIns="91440" tIns="45720" rIns="91440" bIns="45720" rtlCol="0" anchor="ctr">
-            <a:normAutofit/>
+          <a:bodyPr wrap="square" rtlCol="0">
+            <a:spAutoFit/>
           </a:bodyPr>
           <a:lstStyle/>
           <a:p>
-            <a:pPr marL="0" marR="0" lvl="0" indent="0" algn="ctr" defTabSz="914400" rtl="0" eaLnBrk="1" fontAlgn="auto" latinLnBrk="0" hangingPunct="1">
-              <a:lnSpc>
-                <a:spcPct val="100000"/>
-              </a:lnSpc>
-              <a:spcBef>
-                <a:spcPct val="0"/>
-              </a:spcBef>
-              <a:spcAft>
-                <a:spcPts val="0"/>
-              </a:spcAft>
-              <a:buClrTx/>
-              <a:buSzTx/>
-              <a:buFontTx/>
-              <a:buNone/>
-              <a:tabLst/>
-              <a:defRPr/>
-            </a:pPr>
-            <a:r>
-              <a:rPr kumimoji="0" lang="zh-TW" altLang="en-US" sz="1500" b="1" i="0" u="none" strike="noStrike" kern="1200" cap="none" spc="0" normalizeH="0" baseline="0" noProof="0" dirty="0" smtClean="0">
-                <a:ln>
-                  <a:noFill/>
-                </a:ln>
-                <a:solidFill>
-                  <a:srgbClr val="000066"/>
-                </a:solidFill>
-                <a:effectLst/>
-                <a:uLnTx/>
-                <a:uFillTx/>
-                <a:latin typeface="微軟正黑體" pitchFamily="34" charset="-120"/>
-                <a:ea typeface="微軟正黑體" pitchFamily="34" charset="-120"/>
-                <a:cs typeface="+mj-cs"/>
+            <a:pPr algn="ctr"/>
+            <a:r>
+              <a:rPr lang="en-US" sz="3600" b="1" dirty="0">
+                <a:solidFill>
+                  <a:srgbClr val="660033"/>
+                </a:solidFill>
               </a:rPr>
-              <a:t>往天行走</a:t>
-            </a:r>
-            <a:r>
-              <a:rPr kumimoji="0" lang="en-US" altLang="zh-CN" sz="1500" b="1" i="0" u="none" strike="noStrike" kern="1200" cap="none" spc="0" normalizeH="0" baseline="0" noProof="0" dirty="0" smtClean="0">
-                <a:ln>
-                  <a:noFill/>
-                </a:ln>
-                <a:solidFill>
-                  <a:srgbClr val="000066"/>
-                </a:solidFill>
-                <a:effectLst/>
-                <a:uLnTx/>
-                <a:uFillTx/>
-                <a:latin typeface="微軟正黑體" pitchFamily="34" charset="-120"/>
-                <a:ea typeface="微軟正黑體" pitchFamily="34" charset="-120"/>
-                <a:cs typeface="+mj-cs"/>
-              </a:rPr>
-              <a:t>3/8</a:t>
-            </a:r>
-            <a:endParaRPr kumimoji="0" lang="zh-TW" altLang="en-US" sz="1500" b="0" i="0" u="none" strike="noStrike" kern="1200" cap="none" spc="0" normalizeH="0" baseline="0" noProof="0" dirty="0">
-              <a:ln>
-                <a:noFill/>
-              </a:ln>
+              <a:t>( 1 / 4 )</a:t>
+            </a:r>
+            <a:endParaRPr lang="vi-VN" sz="3600" b="1" dirty="0">
               <a:solidFill>
-                <a:srgbClr val="000066"/>
+                <a:srgbClr val="660033"/>
               </a:solidFill>
-              <a:effectLst/>
-              <a:uLnTx/>
-              <a:uFillTx/>
-              <a:latin typeface="微軟正黑體" pitchFamily="34" charset="-120"/>
-              <a:ea typeface="微軟正黑體" pitchFamily="34" charset="-120"/>
-              <a:cs typeface="+mj-cs"/>
             </a:endParaRPr>
           </a:p>
         </p:txBody>
       </p:sp>
     </p:spTree>
+    <p:extLst>
+      <p:ext uri="{BB962C8B-B14F-4D97-AF65-F5344CB8AC3E}">
+        <p14:creationId xmlns:p14="http://schemas.microsoft.com/office/powerpoint/2010/main" val="580899619"/>
+      </p:ext>
+    </p:extLst>
   </p:cSld>
   <p:clrMapOvr>
     <a:masterClrMapping/>
@@ -3812,7 +4899,13 @@
   <p:cSld>
     <p:spTree>
       <p:nvGrpSpPr>
-        <p:cNvPr id="1" name=""/>
+        <p:cNvPr id="1" name="">
+          <a:extLst>
+            <a:ext uri="{FF2B5EF4-FFF2-40B4-BE49-F238E27FC236}">
+              <a16:creationId xmlns:a16="http://schemas.microsoft.com/office/drawing/2014/main" id="{D41110A8-D559-F422-D541-111341E68B9B}"/>
+            </a:ext>
+          </a:extLst>
+        </p:cNvPr>
         <p:cNvGrpSpPr/>
         <p:nvPr/>
       </p:nvGrpSpPr>
@@ -3826,7 +4919,13 @@
       </p:grpSpPr>
       <p:sp>
         <p:nvSpPr>
-          <p:cNvPr id="5" name="內容版面配置區 4"/>
+          <p:cNvPr id="5" name="內容版面配置區 4">
+            <a:extLst>
+              <a:ext uri="{FF2B5EF4-FFF2-40B4-BE49-F238E27FC236}">
+                <a16:creationId xmlns:a16="http://schemas.microsoft.com/office/drawing/2014/main" id="{AC7C198B-36FD-E006-DC15-564C5DA87A33}"/>
+              </a:ext>
+            </a:extLst>
+          </p:cNvPr>
           <p:cNvSpPr>
             <a:spLocks noGrp="1"/>
           </p:cNvSpPr>
@@ -3836,197 +4935,105 @@
         </p:nvSpPr>
         <p:spPr>
           <a:xfrm>
-            <a:off x="0" y="242902"/>
-            <a:ext cx="9144000" cy="5257800"/>
+            <a:off x="0" y="2084851"/>
+            <a:ext cx="12192000" cy="2404863"/>
           </a:xfrm>
         </p:spPr>
         <p:txBody>
-          <a:bodyPr>
+          <a:bodyPr anchor="ctr">
             <a:normAutofit/>
           </a:bodyPr>
           <a:lstStyle/>
           <a:p>
-            <a:pPr algn="ctr">
+            <a:pPr marL="0" indent="0" algn="ctr">
               <a:buNone/>
             </a:pPr>
             <a:r>
-              <a:rPr lang="zh-TW" altLang="en-US" sz="5400" b="1" dirty="0" smtClean="0">
-                <a:solidFill>
-                  <a:srgbClr val="000066"/>
-                </a:solidFill>
-                <a:latin typeface="微軟正黑體" pitchFamily="34" charset="-120"/>
-                <a:ea typeface="微軟正黑體" pitchFamily="34" charset="-120"/>
+              <a:rPr lang="zh-TW" altLang="en-US" sz="6400" b="1" dirty="0">
+                <a:solidFill>
+                  <a:srgbClr val="660033"/>
+                </a:solidFill>
+                <a:latin typeface="Microsoft JhengHei" pitchFamily="34" charset="-120"/>
+                <a:ea typeface="Microsoft JhengHei" pitchFamily="34" charset="-120"/>
               </a:rPr>
-              <a:t>今同心往聖山</a:t>
-            </a:r>
-            <a:endParaRPr lang="en-US" altLang="zh-TW" sz="5400" b="1" dirty="0" smtClean="0">
+              <a:t>皆環繞主座位 </a:t>
+            </a:r>
+            <a:endParaRPr lang="en-US" altLang="zh-TW" sz="6400" b="1" dirty="0">
               <a:solidFill>
-                <a:srgbClr val="000066"/>
+                <a:srgbClr val="660033"/>
               </a:solidFill>
-              <a:latin typeface="微軟正黑體" pitchFamily="34" charset="-120"/>
-              <a:ea typeface="微軟正黑體" pitchFamily="34" charset="-120"/>
+              <a:latin typeface="Microsoft JhengHei" pitchFamily="34" charset="-120"/>
+              <a:ea typeface="Microsoft JhengHei" pitchFamily="34" charset="-120"/>
             </a:endParaRPr>
           </a:p>
           <a:p>
-            <a:pPr algn="ctr">
+            <a:pPr marL="0" indent="0" algn="ctr">
               <a:buNone/>
             </a:pPr>
             <a:r>
-              <a:rPr lang="zh-TW" altLang="en-US" sz="5400" b="1" dirty="0" smtClean="0">
-                <a:solidFill>
-                  <a:srgbClr val="000066"/>
-                </a:solidFill>
-                <a:latin typeface="微軟正黑體" pitchFamily="34" charset="-120"/>
-                <a:ea typeface="微軟正黑體" pitchFamily="34" charset="-120"/>
+              <a:rPr lang="zh-TW" altLang="en-US" sz="6400" b="1" dirty="0">
+                <a:solidFill>
+                  <a:srgbClr val="660033"/>
+                </a:solidFill>
+                <a:latin typeface="Microsoft JhengHei" pitchFamily="34" charset="-120"/>
+                <a:ea typeface="Microsoft JhengHei" pitchFamily="34" charset="-120"/>
               </a:rPr>
-              <a:t>就是那佳美之錫安</a:t>
-            </a:r>
-            <a:endParaRPr lang="en-US" altLang="zh-TW" sz="5400" b="1" dirty="0" smtClean="0">
-              <a:solidFill>
-                <a:srgbClr val="000066"/>
-              </a:solidFill>
-              <a:latin typeface="微軟正黑體" pitchFamily="34" charset="-120"/>
-              <a:ea typeface="微軟正黑體" pitchFamily="34" charset="-120"/>
-            </a:endParaRPr>
-          </a:p>
-          <a:p>
-            <a:pPr algn="ctr">
-              <a:buNone/>
-            </a:pPr>
-            <a:r>
-              <a:rPr lang="zh-TW" altLang="en-US" sz="5400" b="1" dirty="0" smtClean="0">
-                <a:solidFill>
-                  <a:srgbClr val="000066"/>
-                </a:solidFill>
-                <a:latin typeface="微軟正黑體" pitchFamily="34" charset="-120"/>
-                <a:ea typeface="微軟正黑體" pitchFamily="34" charset="-120"/>
-              </a:rPr>
-              <a:t>大家齊步奔往聖山</a:t>
-            </a:r>
-            <a:endParaRPr lang="en-US" altLang="zh-TW" sz="5400" b="1" dirty="0" smtClean="0">
-              <a:solidFill>
-                <a:srgbClr val="000066"/>
-              </a:solidFill>
-              <a:latin typeface="微軟正黑體" pitchFamily="34" charset="-120"/>
-              <a:ea typeface="微軟正黑體" pitchFamily="34" charset="-120"/>
-            </a:endParaRPr>
-          </a:p>
-          <a:p>
-            <a:pPr algn="ctr">
-              <a:buNone/>
-            </a:pPr>
-            <a:r>
-              <a:rPr lang="zh-TW" altLang="en-US" sz="5400" b="1" dirty="0" smtClean="0">
-                <a:solidFill>
-                  <a:srgbClr val="000066"/>
-                </a:solidFill>
-                <a:latin typeface="微軟正黑體" pitchFamily="34" charset="-120"/>
-                <a:ea typeface="微軟正黑體" pitchFamily="34" charset="-120"/>
-              </a:rPr>
-              <a:t>仰望那佳美之聖城</a:t>
-            </a:r>
-            <a:endParaRPr lang="zh-TW" altLang="en-US" sz="5400" b="1" dirty="0">
-              <a:solidFill>
-                <a:srgbClr val="000066"/>
-              </a:solidFill>
-              <a:latin typeface="微軟正黑體" pitchFamily="34" charset="-120"/>
-              <a:ea typeface="微軟正黑體" pitchFamily="34" charset="-120"/>
-            </a:endParaRPr>
-          </a:p>
-        </p:txBody>
-      </p:sp>
-      <p:sp>
-        <p:nvSpPr>
-          <p:cNvPr id="6" name="標題 3"/>
-          <p:cNvSpPr txBox="1">
-            <a:spLocks/>
-          </p:cNvSpPr>
+              <a:t>皆環繞主座位</a:t>
+            </a:r>
+          </a:p>
+        </p:txBody>
+      </p:sp>
+      <p:sp>
+        <p:nvSpPr>
+          <p:cNvPr id="3" name="TextBox 2">
+            <a:extLst>
+              <a:ext uri="{FF2B5EF4-FFF2-40B4-BE49-F238E27FC236}">
+                <a16:creationId xmlns:a16="http://schemas.microsoft.com/office/drawing/2014/main" id="{2C8EA208-6285-2DFC-89B8-7597249B8817}"/>
+              </a:ext>
+            </a:extLst>
+          </p:cNvPr>
+          <p:cNvSpPr txBox="1"/>
           <p:nvPr/>
         </p:nvSpPr>
         <p:spPr>
           <a:xfrm>
-            <a:off x="0" y="6429396"/>
-            <a:ext cx="1357290" cy="428604"/>
+            <a:off x="0" y="5061182"/>
+            <a:ext cx="12192000" cy="646331"/>
           </a:xfrm>
           <a:prstGeom prst="rect">
             <a:avLst/>
           </a:prstGeom>
+          <a:noFill/>
         </p:spPr>
         <p:txBody>
-          <a:bodyPr vert="horz" lIns="91440" tIns="45720" rIns="91440" bIns="45720" rtlCol="0" anchor="ctr">
-            <a:normAutofit/>
+          <a:bodyPr wrap="square" rtlCol="0">
+            <a:spAutoFit/>
           </a:bodyPr>
           <a:lstStyle/>
           <a:p>
-            <a:pPr marL="0" marR="0" lvl="0" indent="0" algn="ctr" defTabSz="914400" rtl="0" eaLnBrk="1" fontAlgn="auto" latinLnBrk="0" hangingPunct="1">
-              <a:lnSpc>
-                <a:spcPct val="100000"/>
-              </a:lnSpc>
-              <a:spcBef>
-                <a:spcPct val="0"/>
-              </a:spcBef>
-              <a:spcAft>
-                <a:spcPts val="0"/>
-              </a:spcAft>
-              <a:buClrTx/>
-              <a:buSzTx/>
-              <a:buFontTx/>
-              <a:buNone/>
-              <a:tabLst/>
-              <a:defRPr/>
-            </a:pPr>
-            <a:r>
-              <a:rPr kumimoji="0" lang="zh-TW" altLang="en-US" sz="1500" b="1" i="0" u="none" strike="noStrike" kern="1200" cap="none" spc="0" normalizeH="0" baseline="0" noProof="0" dirty="0" smtClean="0">
-                <a:ln>
-                  <a:noFill/>
-                </a:ln>
-                <a:solidFill>
-                  <a:srgbClr val="000066"/>
-                </a:solidFill>
-                <a:effectLst/>
-                <a:uLnTx/>
-                <a:uFillTx/>
-                <a:latin typeface="微軟正黑體" pitchFamily="34" charset="-120"/>
-                <a:ea typeface="微軟正黑體" pitchFamily="34" charset="-120"/>
-                <a:cs typeface="+mj-cs"/>
+            <a:pPr algn="ctr"/>
+            <a:r>
+              <a:rPr lang="en-US" sz="3600" b="1" dirty="0">
+                <a:solidFill>
+                  <a:srgbClr val="660033"/>
+                </a:solidFill>
               </a:rPr>
-              <a:t>往天行走</a:t>
-            </a:r>
-            <a:r>
-              <a:rPr kumimoji="0" lang="en-US" altLang="zh-CN" sz="1500" b="1" i="0" u="none" strike="noStrike" kern="1200" cap="none" spc="0" normalizeH="0" baseline="0" noProof="0" dirty="0" smtClean="0">
-                <a:ln>
-                  <a:noFill/>
-                </a:ln>
-                <a:solidFill>
-                  <a:srgbClr val="000066"/>
-                </a:solidFill>
-                <a:effectLst/>
-                <a:uLnTx/>
-                <a:uFillTx/>
-                <a:latin typeface="微軟正黑體" pitchFamily="34" charset="-120"/>
-                <a:ea typeface="微軟正黑體" pitchFamily="34" charset="-120"/>
-                <a:cs typeface="+mj-cs"/>
-              </a:rPr>
-              <a:t>4/8</a:t>
-            </a:r>
-            <a:endParaRPr kumimoji="0" lang="zh-TW" altLang="en-US" sz="1500" b="0" i="0" u="none" strike="noStrike" kern="1200" cap="none" spc="0" normalizeH="0" baseline="0" noProof="0" dirty="0">
-              <a:ln>
-                <a:noFill/>
-              </a:ln>
+              <a:t>( 1 / 4 )</a:t>
+            </a:r>
+            <a:endParaRPr lang="vi-VN" sz="3600" b="1" dirty="0">
               <a:solidFill>
-                <a:srgbClr val="000066"/>
+                <a:srgbClr val="660033"/>
               </a:solidFill>
-              <a:effectLst/>
-              <a:uLnTx/>
-              <a:uFillTx/>
-              <a:latin typeface="微軟正黑體" pitchFamily="34" charset="-120"/>
-              <a:ea typeface="微軟正黑體" pitchFamily="34" charset="-120"/>
-              <a:cs typeface="+mj-cs"/>
             </a:endParaRPr>
           </a:p>
         </p:txBody>
       </p:sp>
     </p:spTree>
+    <p:extLst>
+      <p:ext uri="{BB962C8B-B14F-4D97-AF65-F5344CB8AC3E}">
+        <p14:creationId xmlns:p14="http://schemas.microsoft.com/office/powerpoint/2010/main" val="195112836"/>
+      </p:ext>
+    </p:extLst>
   </p:cSld>
   <p:clrMapOvr>
     <a:masterClrMapping/>
@@ -4039,7 +5046,13 @@
   <p:cSld>
     <p:spTree>
       <p:nvGrpSpPr>
-        <p:cNvPr id="1" name=""/>
+        <p:cNvPr id="1" name="">
+          <a:extLst>
+            <a:ext uri="{FF2B5EF4-FFF2-40B4-BE49-F238E27FC236}">
+              <a16:creationId xmlns:a16="http://schemas.microsoft.com/office/drawing/2014/main" id="{DA179EB4-0BF4-E777-16B6-EB5793475FE9}"/>
+            </a:ext>
+          </a:extLst>
+        </p:cNvPr>
         <p:cNvGrpSpPr/>
         <p:nvPr/>
       </p:nvGrpSpPr>
@@ -4053,7 +5066,13 @@
       </p:grpSpPr>
       <p:sp>
         <p:nvSpPr>
-          <p:cNvPr id="5" name="內容版面配置區 4"/>
+          <p:cNvPr id="5" name="內容版面配置區 4">
+            <a:extLst>
+              <a:ext uri="{FF2B5EF4-FFF2-40B4-BE49-F238E27FC236}">
+                <a16:creationId xmlns:a16="http://schemas.microsoft.com/office/drawing/2014/main" id="{536CC3ED-8889-AF05-503A-A998AD767DDA}"/>
+              </a:ext>
+            </a:extLst>
+          </p:cNvPr>
           <p:cNvSpPr>
             <a:spLocks noGrp="1"/>
           </p:cNvSpPr>
@@ -4063,190 +5082,53 @@
         </p:nvSpPr>
         <p:spPr>
           <a:xfrm>
-            <a:off x="0" y="242902"/>
-            <a:ext cx="9144000" cy="5257800"/>
+            <a:off x="0" y="2084851"/>
+            <a:ext cx="12192000" cy="2404863"/>
           </a:xfrm>
         </p:spPr>
         <p:txBody>
-          <a:bodyPr>
+          <a:bodyPr anchor="ctr">
             <a:normAutofit/>
           </a:bodyPr>
           <a:lstStyle/>
           <a:p>
-            <a:pPr algn="ctr">
+            <a:pPr marL="0" indent="0" algn="ctr">
               <a:buNone/>
             </a:pPr>
             <a:r>
-              <a:rPr lang="zh-TW" altLang="en-US" sz="5400" b="1" dirty="0" smtClean="0">
-                <a:solidFill>
-                  <a:srgbClr val="000066"/>
-                </a:solidFill>
-                <a:latin typeface="微軟正黑體" pitchFamily="34" charset="-120"/>
-                <a:ea typeface="微軟正黑體" pitchFamily="34" charset="-120"/>
+              <a:rPr lang="zh-TW" altLang="en-US" sz="6400" b="1" dirty="0">
+                <a:solidFill>
+                  <a:srgbClr val="660033"/>
+                </a:solidFill>
+                <a:latin typeface="Microsoft JhengHei" pitchFamily="34" charset="-120"/>
+                <a:ea typeface="Microsoft JhengHei" pitchFamily="34" charset="-120"/>
               </a:rPr>
-              <a:t>未走到天上城  未行那黃金路</a:t>
-            </a:r>
-            <a:endParaRPr lang="en-US" altLang="zh-TW" sz="5400" b="1" dirty="0" smtClean="0">
-              <a:solidFill>
-                <a:srgbClr val="000066"/>
-              </a:solidFill>
-              <a:latin typeface="微軟正黑體" pitchFamily="34" charset="-120"/>
-              <a:ea typeface="微軟正黑體" pitchFamily="34" charset="-120"/>
-            </a:endParaRPr>
-          </a:p>
-          <a:p>
-            <a:pPr algn="ctr">
+              <a:t>今同心往聖山</a:t>
+            </a:r>
+          </a:p>
+          <a:p>
+            <a:pPr marL="0" indent="0" algn="ctr">
               <a:buNone/>
             </a:pPr>
             <a:r>
-              <a:rPr lang="zh-TW" altLang="en-US" sz="5400" b="1" dirty="0" smtClean="0">
-                <a:solidFill>
-                  <a:srgbClr val="000066"/>
-                </a:solidFill>
-                <a:latin typeface="微軟正黑體" pitchFamily="34" charset="-120"/>
-                <a:ea typeface="微軟正黑體" pitchFamily="34" charset="-120"/>
+              <a:rPr lang="zh-TW" altLang="en-US" sz="6400" b="1" dirty="0">
+                <a:solidFill>
+                  <a:srgbClr val="660033"/>
+                </a:solidFill>
+                <a:latin typeface="Microsoft JhengHei" pitchFamily="34" charset="-120"/>
+                <a:ea typeface="Microsoft JhengHei" pitchFamily="34" charset="-120"/>
               </a:rPr>
-              <a:t>從主的民已得太平</a:t>
-            </a:r>
-            <a:endParaRPr lang="en-US" altLang="zh-TW" sz="5400" b="1" dirty="0" smtClean="0">
-              <a:solidFill>
-                <a:srgbClr val="000066"/>
-              </a:solidFill>
-              <a:latin typeface="微軟正黑體" pitchFamily="34" charset="-120"/>
-              <a:ea typeface="微軟正黑體" pitchFamily="34" charset="-120"/>
-            </a:endParaRPr>
-          </a:p>
-          <a:p>
-            <a:pPr algn="ctr">
-              <a:buNone/>
-            </a:pPr>
-            <a:r>
-              <a:rPr lang="zh-TW" altLang="en-US" sz="5400" b="1" dirty="0" smtClean="0">
-                <a:solidFill>
-                  <a:srgbClr val="000066"/>
-                </a:solidFill>
-                <a:latin typeface="微軟正黑體" pitchFamily="34" charset="-120"/>
-                <a:ea typeface="微軟正黑體" pitchFamily="34" charset="-120"/>
-              </a:rPr>
-              <a:t>從主的民已得太平</a:t>
-            </a:r>
-            <a:endParaRPr lang="en-US" altLang="zh-TW" sz="5400" b="1" dirty="0" smtClean="0">
-              <a:solidFill>
-                <a:srgbClr val="000066"/>
-              </a:solidFill>
-              <a:latin typeface="微軟正黑體" pitchFamily="34" charset="-120"/>
-              <a:ea typeface="微軟正黑體" pitchFamily="34" charset="-120"/>
-            </a:endParaRPr>
-          </a:p>
-          <a:p>
-            <a:pPr algn="ctr">
-              <a:buNone/>
-            </a:pPr>
-            <a:r>
-              <a:rPr lang="zh-TW" altLang="en-US" sz="5400" b="1" dirty="0" smtClean="0">
-                <a:solidFill>
-                  <a:srgbClr val="000066"/>
-                </a:solidFill>
-                <a:latin typeface="微軟正黑體" pitchFamily="34" charset="-120"/>
-                <a:ea typeface="微軟正黑體" pitchFamily="34" charset="-120"/>
-              </a:rPr>
-              <a:t>一路蒙福無數  一路蒙福無數</a:t>
-            </a:r>
-          </a:p>
-        </p:txBody>
-      </p:sp>
-      <p:sp>
-        <p:nvSpPr>
-          <p:cNvPr id="6" name="標題 3"/>
-          <p:cNvSpPr txBox="1">
-            <a:spLocks/>
-          </p:cNvSpPr>
-          <p:nvPr/>
-        </p:nvSpPr>
-        <p:spPr>
-          <a:xfrm>
-            <a:off x="0" y="6429396"/>
-            <a:ext cx="1357290" cy="428604"/>
-          </a:xfrm>
-          <a:prstGeom prst="rect">
-            <a:avLst/>
-          </a:prstGeom>
-        </p:spPr>
-        <p:txBody>
-          <a:bodyPr vert="horz" lIns="91440" tIns="45720" rIns="91440" bIns="45720" rtlCol="0" anchor="ctr">
-            <a:normAutofit/>
-          </a:bodyPr>
-          <a:lstStyle/>
-          <a:p>
-            <a:pPr marL="0" marR="0" lvl="0" indent="0" algn="ctr" defTabSz="914400" rtl="0" eaLnBrk="1" fontAlgn="auto" latinLnBrk="0" hangingPunct="1">
-              <a:lnSpc>
-                <a:spcPct val="100000"/>
-              </a:lnSpc>
-              <a:spcBef>
-                <a:spcPct val="0"/>
-              </a:spcBef>
-              <a:spcAft>
-                <a:spcPts val="0"/>
-              </a:spcAft>
-              <a:buClrTx/>
-              <a:buSzTx/>
-              <a:buFontTx/>
-              <a:buNone/>
-              <a:tabLst/>
-              <a:defRPr/>
-            </a:pPr>
-            <a:r>
-              <a:rPr kumimoji="0" lang="zh-TW" altLang="en-US" sz="1500" b="1" i="0" u="none" strike="noStrike" kern="1200" cap="none" spc="0" normalizeH="0" baseline="0" noProof="0" dirty="0" smtClean="0">
-                <a:ln>
-                  <a:noFill/>
-                </a:ln>
-                <a:solidFill>
-                  <a:srgbClr val="000066"/>
-                </a:solidFill>
-                <a:effectLst/>
-                <a:uLnTx/>
-                <a:uFillTx/>
-                <a:latin typeface="微軟正黑體" pitchFamily="34" charset="-120"/>
-                <a:ea typeface="微軟正黑體" pitchFamily="34" charset="-120"/>
-                <a:cs typeface="+mj-cs"/>
-              </a:rPr>
-              <a:t>往天行走</a:t>
-            </a:r>
-            <a:r>
-              <a:rPr kumimoji="0" lang="en-US" altLang="zh-CN" sz="1500" b="1" i="0" u="none" strike="noStrike" kern="1200" cap="none" spc="0" normalizeH="0" baseline="0" noProof="0" dirty="0" smtClean="0">
-                <a:ln>
-                  <a:noFill/>
-                </a:ln>
-                <a:solidFill>
-                  <a:srgbClr val="000066"/>
-                </a:solidFill>
-                <a:effectLst/>
-                <a:uLnTx/>
-                <a:uFillTx/>
-                <a:latin typeface="微軟正黑體" pitchFamily="34" charset="-120"/>
-                <a:ea typeface="微軟正黑體" pitchFamily="34" charset="-120"/>
-                <a:cs typeface="+mj-cs"/>
-              </a:rPr>
-              <a:t>5/8</a:t>
-            </a:r>
-            <a:endParaRPr kumimoji="0" lang="zh-TW" altLang="en-US" sz="1500" b="0" i="0" u="none" strike="noStrike" kern="1200" cap="none" spc="0" normalizeH="0" baseline="0" noProof="0" dirty="0">
-              <a:ln>
-                <a:noFill/>
-              </a:ln>
-              <a:solidFill>
-                <a:srgbClr val="000066"/>
-              </a:solidFill>
-              <a:effectLst/>
-              <a:uLnTx/>
-              <a:uFillTx/>
-              <a:latin typeface="微軟正黑體" pitchFamily="34" charset="-120"/>
-              <a:ea typeface="微軟正黑體" pitchFamily="34" charset="-120"/>
-              <a:cs typeface="+mj-cs"/>
-            </a:endParaRPr>
+              <a:t>就是那佳美之錫安</a:t>
+            </a:r>
           </a:p>
         </p:txBody>
       </p:sp>
     </p:spTree>
+    <p:extLst>
+      <p:ext uri="{BB962C8B-B14F-4D97-AF65-F5344CB8AC3E}">
+        <p14:creationId xmlns:p14="http://schemas.microsoft.com/office/powerpoint/2010/main" val="3016240266"/>
+      </p:ext>
+    </p:extLst>
   </p:cSld>
   <p:clrMapOvr>
     <a:masterClrMapping/>
@@ -4259,7 +5141,13 @@
   <p:cSld>
     <p:spTree>
       <p:nvGrpSpPr>
-        <p:cNvPr id="1" name=""/>
+        <p:cNvPr id="1" name="">
+          <a:extLst>
+            <a:ext uri="{FF2B5EF4-FFF2-40B4-BE49-F238E27FC236}">
+              <a16:creationId xmlns:a16="http://schemas.microsoft.com/office/drawing/2014/main" id="{A1C01A67-9EAA-E47F-E1C0-8386B4D6F935}"/>
+            </a:ext>
+          </a:extLst>
+        </p:cNvPr>
         <p:cNvGrpSpPr/>
         <p:nvPr/>
       </p:nvGrpSpPr>
@@ -4273,7 +5161,13 @@
       </p:grpSpPr>
       <p:sp>
         <p:nvSpPr>
-          <p:cNvPr id="5" name="內容版面配置區 4"/>
+          <p:cNvPr id="5" name="內容版面配置區 4">
+            <a:extLst>
+              <a:ext uri="{FF2B5EF4-FFF2-40B4-BE49-F238E27FC236}">
+                <a16:creationId xmlns:a16="http://schemas.microsoft.com/office/drawing/2014/main" id="{483E5FC9-705F-9A32-D4B7-6EACBE059739}"/>
+              </a:ext>
+            </a:extLst>
+          </p:cNvPr>
           <p:cNvSpPr>
             <a:spLocks noGrp="1"/>
           </p:cNvSpPr>
@@ -4283,197 +5177,53 @@
         </p:nvSpPr>
         <p:spPr>
           <a:xfrm>
-            <a:off x="0" y="242902"/>
-            <a:ext cx="9144000" cy="5257800"/>
+            <a:off x="0" y="2084851"/>
+            <a:ext cx="12192000" cy="2404863"/>
           </a:xfrm>
         </p:spPr>
         <p:txBody>
-          <a:bodyPr>
+          <a:bodyPr anchor="ctr">
             <a:normAutofit/>
           </a:bodyPr>
           <a:lstStyle/>
           <a:p>
-            <a:pPr algn="ctr">
+            <a:pPr marL="0" indent="0" algn="ctr">
               <a:buNone/>
             </a:pPr>
             <a:r>
-              <a:rPr lang="zh-TW" altLang="en-US" sz="5400" b="1" dirty="0" smtClean="0">
-                <a:solidFill>
-                  <a:srgbClr val="000066"/>
-                </a:solidFill>
-                <a:latin typeface="微軟正黑體" pitchFamily="34" charset="-120"/>
-                <a:ea typeface="微軟正黑體" pitchFamily="34" charset="-120"/>
-              </a:rPr>
-              <a:t>今同心往聖山</a:t>
-            </a:r>
-            <a:endParaRPr lang="en-US" altLang="zh-TW" sz="5400" b="1" dirty="0" smtClean="0">
-              <a:solidFill>
-                <a:srgbClr val="000066"/>
-              </a:solidFill>
-              <a:latin typeface="微軟正黑體" pitchFamily="34" charset="-120"/>
-              <a:ea typeface="微軟正黑體" pitchFamily="34" charset="-120"/>
-            </a:endParaRPr>
-          </a:p>
-          <a:p>
-            <a:pPr algn="ctr">
-              <a:buNone/>
-            </a:pPr>
-            <a:r>
-              <a:rPr lang="zh-TW" altLang="en-US" sz="5400" b="1" dirty="0" smtClean="0">
-                <a:solidFill>
-                  <a:srgbClr val="000066"/>
-                </a:solidFill>
-                <a:latin typeface="微軟正黑體" pitchFamily="34" charset="-120"/>
-                <a:ea typeface="微軟正黑體" pitchFamily="34" charset="-120"/>
-              </a:rPr>
-              <a:t>就是那佳美之錫安</a:t>
-            </a:r>
-            <a:endParaRPr lang="en-US" altLang="zh-TW" sz="5400" b="1" dirty="0" smtClean="0">
-              <a:solidFill>
-                <a:srgbClr val="000066"/>
-              </a:solidFill>
-              <a:latin typeface="微軟正黑體" pitchFamily="34" charset="-120"/>
-              <a:ea typeface="微軟正黑體" pitchFamily="34" charset="-120"/>
-            </a:endParaRPr>
-          </a:p>
-          <a:p>
-            <a:pPr algn="ctr">
-              <a:buNone/>
-            </a:pPr>
-            <a:r>
-              <a:rPr lang="zh-TW" altLang="en-US" sz="5400" b="1" dirty="0" smtClean="0">
-                <a:solidFill>
-                  <a:srgbClr val="000066"/>
-                </a:solidFill>
-                <a:latin typeface="微軟正黑體" pitchFamily="34" charset="-120"/>
-                <a:ea typeface="微軟正黑體" pitchFamily="34" charset="-120"/>
+              <a:rPr lang="zh-TW" altLang="en-US" sz="6400" b="1" dirty="0">
+                <a:solidFill>
+                  <a:srgbClr val="660033"/>
+                </a:solidFill>
+                <a:latin typeface="Microsoft JhengHei" pitchFamily="34" charset="-120"/>
+                <a:ea typeface="Microsoft JhengHei" pitchFamily="34" charset="-120"/>
               </a:rPr>
               <a:t>大家齊步奔往聖山</a:t>
             </a:r>
-            <a:endParaRPr lang="en-US" altLang="zh-TW" sz="5400" b="1" dirty="0" smtClean="0">
-              <a:solidFill>
-                <a:srgbClr val="000066"/>
-              </a:solidFill>
-              <a:latin typeface="微軟正黑體" pitchFamily="34" charset="-120"/>
-              <a:ea typeface="微軟正黑體" pitchFamily="34" charset="-120"/>
-            </a:endParaRPr>
-          </a:p>
-          <a:p>
-            <a:pPr algn="ctr">
+          </a:p>
+          <a:p>
+            <a:pPr marL="0" indent="0" algn="ctr">
               <a:buNone/>
             </a:pPr>
             <a:r>
-              <a:rPr lang="zh-TW" altLang="en-US" sz="5400" b="1" dirty="0" smtClean="0">
-                <a:solidFill>
-                  <a:srgbClr val="000066"/>
-                </a:solidFill>
-                <a:latin typeface="微軟正黑體" pitchFamily="34" charset="-120"/>
-                <a:ea typeface="微軟正黑體" pitchFamily="34" charset="-120"/>
+              <a:rPr lang="zh-TW" altLang="en-US" sz="6400" b="1" dirty="0">
+                <a:solidFill>
+                  <a:srgbClr val="660033"/>
+                </a:solidFill>
+                <a:latin typeface="Microsoft JhengHei" pitchFamily="34" charset="-120"/>
+                <a:ea typeface="Microsoft JhengHei" pitchFamily="34" charset="-120"/>
               </a:rPr>
               <a:t>仰望那佳美之聖城</a:t>
             </a:r>
-            <a:endParaRPr lang="zh-TW" altLang="en-US" sz="5400" b="1" dirty="0">
-              <a:solidFill>
-                <a:srgbClr val="000066"/>
-              </a:solidFill>
-              <a:latin typeface="微軟正黑體" pitchFamily="34" charset="-120"/>
-              <a:ea typeface="微軟正黑體" pitchFamily="34" charset="-120"/>
-            </a:endParaRPr>
-          </a:p>
-        </p:txBody>
-      </p:sp>
-      <p:sp>
-        <p:nvSpPr>
-          <p:cNvPr id="6" name="標題 3"/>
-          <p:cNvSpPr txBox="1">
-            <a:spLocks/>
-          </p:cNvSpPr>
-          <p:nvPr/>
-        </p:nvSpPr>
-        <p:spPr>
-          <a:xfrm>
-            <a:off x="0" y="6429396"/>
-            <a:ext cx="1357290" cy="428604"/>
-          </a:xfrm>
-          <a:prstGeom prst="rect">
-            <a:avLst/>
-          </a:prstGeom>
-        </p:spPr>
-        <p:txBody>
-          <a:bodyPr vert="horz" lIns="91440" tIns="45720" rIns="91440" bIns="45720" rtlCol="0" anchor="ctr">
-            <a:normAutofit/>
-          </a:bodyPr>
-          <a:lstStyle/>
-          <a:p>
-            <a:pPr marL="0" marR="0" lvl="0" indent="0" algn="ctr" defTabSz="914400" rtl="0" eaLnBrk="1" fontAlgn="auto" latinLnBrk="0" hangingPunct="1">
-              <a:lnSpc>
-                <a:spcPct val="100000"/>
-              </a:lnSpc>
-              <a:spcBef>
-                <a:spcPct val="0"/>
-              </a:spcBef>
-              <a:spcAft>
-                <a:spcPts val="0"/>
-              </a:spcAft>
-              <a:buClrTx/>
-              <a:buSzTx/>
-              <a:buFontTx/>
-              <a:buNone/>
-              <a:tabLst/>
-              <a:defRPr/>
-            </a:pPr>
-            <a:r>
-              <a:rPr kumimoji="0" lang="zh-TW" altLang="en-US" sz="1500" b="1" i="0" u="none" strike="noStrike" kern="1200" cap="none" spc="0" normalizeH="0" baseline="0" noProof="0" dirty="0" smtClean="0">
-                <a:ln>
-                  <a:noFill/>
-                </a:ln>
-                <a:solidFill>
-                  <a:srgbClr val="000066"/>
-                </a:solidFill>
-                <a:effectLst/>
-                <a:uLnTx/>
-                <a:uFillTx/>
-                <a:latin typeface="微軟正黑體" pitchFamily="34" charset="-120"/>
-                <a:ea typeface="微軟正黑體" pitchFamily="34" charset="-120"/>
-                <a:cs typeface="+mj-cs"/>
-              </a:rPr>
-              <a:t>往天行走</a:t>
-            </a:r>
-            <a:r>
-              <a:rPr kumimoji="0" lang="en-US" altLang="zh-CN" sz="1500" b="1" i="0" u="none" strike="noStrike" kern="1200" cap="none" spc="0" normalizeH="0" baseline="0" noProof="0" dirty="0" smtClean="0">
-                <a:ln>
-                  <a:noFill/>
-                </a:ln>
-                <a:solidFill>
-                  <a:srgbClr val="000066"/>
-                </a:solidFill>
-                <a:effectLst/>
-                <a:uLnTx/>
-                <a:uFillTx/>
-                <a:latin typeface="微軟正黑體" pitchFamily="34" charset="-120"/>
-                <a:ea typeface="微軟正黑體" pitchFamily="34" charset="-120"/>
-                <a:cs typeface="+mj-cs"/>
-              </a:rPr>
-              <a:t>6/8</a:t>
-            </a:r>
-            <a:endParaRPr kumimoji="0" lang="zh-TW" altLang="en-US" sz="1500" b="0" i="0" u="none" strike="noStrike" kern="1200" cap="none" spc="0" normalizeH="0" baseline="0" noProof="0" dirty="0">
-              <a:ln>
-                <a:noFill/>
-              </a:ln>
-              <a:solidFill>
-                <a:srgbClr val="000066"/>
-              </a:solidFill>
-              <a:effectLst/>
-              <a:uLnTx/>
-              <a:uFillTx/>
-              <a:latin typeface="微軟正黑體" pitchFamily="34" charset="-120"/>
-              <a:ea typeface="微軟正黑體" pitchFamily="34" charset="-120"/>
-              <a:cs typeface="+mj-cs"/>
-            </a:endParaRPr>
           </a:p>
         </p:txBody>
       </p:sp>
     </p:spTree>
+    <p:extLst>
+      <p:ext uri="{BB962C8B-B14F-4D97-AF65-F5344CB8AC3E}">
+        <p14:creationId xmlns:p14="http://schemas.microsoft.com/office/powerpoint/2010/main" val="1286926781"/>
+      </p:ext>
+    </p:extLst>
   </p:cSld>
   <p:clrMapOvr>
     <a:masterClrMapping/>
@@ -4486,7 +5236,13 @@
   <p:cSld>
     <p:spTree>
       <p:nvGrpSpPr>
-        <p:cNvPr id="1" name=""/>
+        <p:cNvPr id="1" name="">
+          <a:extLst>
+            <a:ext uri="{FF2B5EF4-FFF2-40B4-BE49-F238E27FC236}">
+              <a16:creationId xmlns:a16="http://schemas.microsoft.com/office/drawing/2014/main" id="{9B69D8E3-D23B-272E-23EC-3263751226FF}"/>
+            </a:ext>
+          </a:extLst>
+        </p:cNvPr>
         <p:cNvGrpSpPr/>
         <p:nvPr/>
       </p:nvGrpSpPr>
@@ -4500,7 +5256,13 @@
       </p:grpSpPr>
       <p:sp>
         <p:nvSpPr>
-          <p:cNvPr id="5" name="內容版面配置區 4"/>
+          <p:cNvPr id="5" name="內容版面配置區 4">
+            <a:extLst>
+              <a:ext uri="{FF2B5EF4-FFF2-40B4-BE49-F238E27FC236}">
+                <a16:creationId xmlns:a16="http://schemas.microsoft.com/office/drawing/2014/main" id="{BDA5DDE3-3CB0-5A03-64D1-19A142B788E4}"/>
+              </a:ext>
+            </a:extLst>
+          </p:cNvPr>
           <p:cNvSpPr>
             <a:spLocks noGrp="1"/>
           </p:cNvSpPr>
@@ -4510,200 +5272,105 @@
         </p:nvSpPr>
         <p:spPr>
           <a:xfrm>
-            <a:off x="0" y="242902"/>
-            <a:ext cx="9144000" cy="5257800"/>
+            <a:off x="0" y="2084851"/>
+            <a:ext cx="12192000" cy="2404863"/>
           </a:xfrm>
         </p:spPr>
         <p:txBody>
-          <a:bodyPr>
+          <a:bodyPr anchor="ctr">
             <a:normAutofit/>
           </a:bodyPr>
           <a:lstStyle/>
           <a:p>
-            <a:pPr algn="ctr">
+            <a:pPr marL="0" indent="0" algn="ctr">
               <a:buNone/>
             </a:pPr>
             <a:r>
-              <a:rPr lang="zh-TW" altLang="en-US" sz="5400" b="1" dirty="0" smtClean="0">
-                <a:solidFill>
-                  <a:srgbClr val="000066"/>
-                </a:solidFill>
-                <a:latin typeface="微軟正黑體" pitchFamily="34" charset="-120"/>
-                <a:ea typeface="微軟正黑體" pitchFamily="34" charset="-120"/>
+              <a:rPr lang="zh-TW" altLang="en-US" sz="6400" b="1" dirty="0">
+                <a:solidFill>
+                  <a:srgbClr val="660033"/>
+                </a:solidFill>
+                <a:latin typeface="Microsoft JhengHei" pitchFamily="34" charset="-120"/>
+                <a:ea typeface="Microsoft JhengHei" pitchFamily="34" charset="-120"/>
               </a:rPr>
-              <a:t>故此歡樂無窮  我眼淚都擦淨</a:t>
-            </a:r>
-            <a:endParaRPr lang="en-US" altLang="zh-TW" sz="5400" b="1" dirty="0" smtClean="0">
+              <a:t>若有人未識主 </a:t>
+            </a:r>
+            <a:endParaRPr lang="en-US" altLang="zh-TW" sz="6400" b="1" dirty="0">
               <a:solidFill>
-                <a:srgbClr val="000066"/>
+                <a:srgbClr val="660033"/>
               </a:solidFill>
-              <a:latin typeface="微軟正黑體" pitchFamily="34" charset="-120"/>
-              <a:ea typeface="微軟正黑體" pitchFamily="34" charset="-120"/>
+              <a:latin typeface="Microsoft JhengHei" pitchFamily="34" charset="-120"/>
+              <a:ea typeface="Microsoft JhengHei" pitchFamily="34" charset="-120"/>
             </a:endParaRPr>
           </a:p>
           <a:p>
-            <a:pPr algn="ctr">
+            <a:pPr marL="0" indent="0" algn="ctr">
               <a:buNone/>
             </a:pPr>
             <a:r>
-              <a:rPr lang="zh-TW" altLang="en-US" sz="5400" b="1" dirty="0" smtClean="0">
-                <a:solidFill>
-                  <a:srgbClr val="000066"/>
-                </a:solidFill>
-                <a:latin typeface="微軟正黑體" pitchFamily="34" charset="-120"/>
-                <a:ea typeface="微軟正黑體" pitchFamily="34" charset="-120"/>
+              <a:rPr lang="zh-TW" altLang="en-US" sz="6400" b="1" dirty="0">
+                <a:solidFill>
+                  <a:srgbClr val="660033"/>
+                </a:solidFill>
+                <a:latin typeface="Microsoft JhengHei" pitchFamily="34" charset="-120"/>
+                <a:ea typeface="Microsoft JhengHei" pitchFamily="34" charset="-120"/>
               </a:rPr>
-              <a:t>前面榮光就是</a:t>
-            </a:r>
-            <a:r>
-              <a:rPr lang="zh-TW" altLang="en-US" sz="5400" b="1" dirty="0" smtClean="0">
-                <a:solidFill>
-                  <a:srgbClr val="000066"/>
-                </a:solidFill>
-                <a:latin typeface="微軟正黑體" pitchFamily="34" charset="-120"/>
-                <a:ea typeface="微軟正黑體" pitchFamily="34" charset="-120"/>
-              </a:rPr>
-              <a:t>明宮</a:t>
-            </a:r>
-            <a:endParaRPr lang="en-US" altLang="zh-TW" sz="5400" b="1" dirty="0" smtClean="0">
-              <a:solidFill>
-                <a:srgbClr val="000066"/>
-              </a:solidFill>
-              <a:latin typeface="微軟正黑體" pitchFamily="34" charset="-120"/>
-              <a:ea typeface="微軟正黑體" pitchFamily="34" charset="-120"/>
-            </a:endParaRPr>
-          </a:p>
-          <a:p>
-            <a:pPr algn="ctr">
-              <a:buNone/>
-            </a:pPr>
-            <a:r>
-              <a:rPr lang="zh-TW" altLang="en-US" sz="5400" b="1" dirty="0" smtClean="0">
-                <a:solidFill>
-                  <a:srgbClr val="000066"/>
-                </a:solidFill>
-                <a:latin typeface="微軟正黑體" pitchFamily="34" charset="-120"/>
-                <a:ea typeface="微軟正黑體" pitchFamily="34" charset="-120"/>
-              </a:rPr>
-              <a:t>前面榮光就是明宮</a:t>
-            </a:r>
-            <a:endParaRPr lang="en-US" altLang="zh-TW" sz="5400" b="1" dirty="0" smtClean="0">
-              <a:solidFill>
-                <a:srgbClr val="000066"/>
-              </a:solidFill>
-              <a:latin typeface="微軟正黑體" pitchFamily="34" charset="-120"/>
-              <a:ea typeface="微軟正黑體" pitchFamily="34" charset="-120"/>
-            </a:endParaRPr>
-          </a:p>
-          <a:p>
-            <a:pPr algn="ctr">
-              <a:buNone/>
-            </a:pPr>
-            <a:r>
-              <a:rPr lang="zh-TW" altLang="en-US" sz="5400" b="1" dirty="0" smtClean="0">
-                <a:solidFill>
-                  <a:srgbClr val="000066"/>
-                </a:solidFill>
-                <a:latin typeface="微軟正黑體" pitchFamily="34" charset="-120"/>
-                <a:ea typeface="微軟正黑體" pitchFamily="34" charset="-120"/>
-              </a:rPr>
-              <a:t>過片時到樂境  過片時到樂境</a:t>
-            </a:r>
-          </a:p>
-        </p:txBody>
-      </p:sp>
-      <p:sp>
-        <p:nvSpPr>
-          <p:cNvPr id="6" name="標題 3"/>
-          <p:cNvSpPr txBox="1">
-            <a:spLocks/>
-          </p:cNvSpPr>
+              <a:t>頌主自然無味</a:t>
+            </a:r>
+          </a:p>
+        </p:txBody>
+      </p:sp>
+      <p:sp>
+        <p:nvSpPr>
+          <p:cNvPr id="3" name="TextBox 2">
+            <a:extLst>
+              <a:ext uri="{FF2B5EF4-FFF2-40B4-BE49-F238E27FC236}">
+                <a16:creationId xmlns:a16="http://schemas.microsoft.com/office/drawing/2014/main" id="{091D703F-82D0-5B63-FBA2-E7DC15414398}"/>
+              </a:ext>
+            </a:extLst>
+          </p:cNvPr>
+          <p:cNvSpPr txBox="1"/>
           <p:nvPr/>
         </p:nvSpPr>
         <p:spPr>
           <a:xfrm>
-            <a:off x="0" y="6429396"/>
-            <a:ext cx="1357290" cy="428604"/>
+            <a:off x="0" y="5061182"/>
+            <a:ext cx="12192000" cy="646331"/>
           </a:xfrm>
           <a:prstGeom prst="rect">
             <a:avLst/>
           </a:prstGeom>
+          <a:noFill/>
         </p:spPr>
         <p:txBody>
-          <a:bodyPr vert="horz" lIns="91440" tIns="45720" rIns="91440" bIns="45720" rtlCol="0" anchor="ctr">
-            <a:normAutofit/>
+          <a:bodyPr wrap="square" rtlCol="0">
+            <a:spAutoFit/>
           </a:bodyPr>
           <a:lstStyle/>
           <a:p>
-            <a:pPr marL="0" marR="0" lvl="0" indent="0" algn="ctr" defTabSz="914400" rtl="0" eaLnBrk="1" fontAlgn="auto" latinLnBrk="0" hangingPunct="1">
-              <a:lnSpc>
-                <a:spcPct val="100000"/>
-              </a:lnSpc>
-              <a:spcBef>
-                <a:spcPct val="0"/>
-              </a:spcBef>
-              <a:spcAft>
-                <a:spcPts val="0"/>
-              </a:spcAft>
-              <a:buClrTx/>
-              <a:buSzTx/>
-              <a:buFontTx/>
-              <a:buNone/>
-              <a:tabLst/>
-              <a:defRPr/>
-            </a:pPr>
-            <a:r>
-              <a:rPr kumimoji="0" lang="zh-TW" altLang="en-US" sz="1500" b="1" i="0" u="none" strike="noStrike" kern="1200" cap="none" spc="0" normalizeH="0" baseline="0" noProof="0" dirty="0" smtClean="0">
-                <a:ln>
-                  <a:noFill/>
-                </a:ln>
-                <a:solidFill>
-                  <a:srgbClr val="000066"/>
-                </a:solidFill>
-                <a:effectLst/>
-                <a:uLnTx/>
-                <a:uFillTx/>
-                <a:latin typeface="微軟正黑體" pitchFamily="34" charset="-120"/>
-                <a:ea typeface="微軟正黑體" pitchFamily="34" charset="-120"/>
-                <a:cs typeface="+mj-cs"/>
+            <a:pPr algn="ctr"/>
+            <a:r>
+              <a:rPr lang="en-US" sz="3600" b="1" dirty="0">
+                <a:solidFill>
+                  <a:srgbClr val="660033"/>
+                </a:solidFill>
               </a:rPr>
-              <a:t>往天行走</a:t>
-            </a:r>
-            <a:r>
-              <a:rPr kumimoji="0" lang="en-US" altLang="zh-CN" sz="1500" b="1" i="0" u="none" strike="noStrike" kern="1200" cap="none" spc="0" normalizeH="0" baseline="0" noProof="0" dirty="0" smtClean="0">
-                <a:ln>
-                  <a:noFill/>
-                </a:ln>
-                <a:solidFill>
-                  <a:srgbClr val="000066"/>
-                </a:solidFill>
-                <a:effectLst/>
-                <a:uLnTx/>
-                <a:uFillTx/>
-                <a:latin typeface="微軟正黑體" pitchFamily="34" charset="-120"/>
-                <a:ea typeface="微軟正黑體" pitchFamily="34" charset="-120"/>
-                <a:cs typeface="+mj-cs"/>
-              </a:rPr>
-              <a:t>7/8</a:t>
-            </a:r>
-            <a:endParaRPr kumimoji="0" lang="zh-TW" altLang="en-US" sz="1500" b="0" i="0" u="none" strike="noStrike" kern="1200" cap="none" spc="0" normalizeH="0" baseline="0" noProof="0" dirty="0">
-              <a:ln>
-                <a:noFill/>
-              </a:ln>
+              <a:t>( 2 / 4 )</a:t>
+            </a:r>
+            <a:endParaRPr lang="vi-VN" sz="3600" b="1" dirty="0">
               <a:solidFill>
-                <a:srgbClr val="000066"/>
+                <a:srgbClr val="660033"/>
               </a:solidFill>
-              <a:effectLst/>
-              <a:uLnTx/>
-              <a:uFillTx/>
-              <a:latin typeface="微軟正黑體" pitchFamily="34" charset="-120"/>
-              <a:ea typeface="微軟正黑體" pitchFamily="34" charset="-120"/>
-              <a:cs typeface="+mj-cs"/>
             </a:endParaRPr>
           </a:p>
         </p:txBody>
       </p:sp>
     </p:spTree>
+    <p:extLst>
+      <p:ext uri="{BB962C8B-B14F-4D97-AF65-F5344CB8AC3E}">
+        <p14:creationId xmlns:p14="http://schemas.microsoft.com/office/powerpoint/2010/main" val="1920894758"/>
+      </p:ext>
+    </p:extLst>
   </p:cSld>
   <p:clrMapOvr>
     <a:masterClrMapping/>
@@ -4716,7 +5383,13 @@
   <p:cSld>
     <p:spTree>
       <p:nvGrpSpPr>
-        <p:cNvPr id="1" name=""/>
+        <p:cNvPr id="1" name="">
+          <a:extLst>
+            <a:ext uri="{FF2B5EF4-FFF2-40B4-BE49-F238E27FC236}">
+              <a16:creationId xmlns:a16="http://schemas.microsoft.com/office/drawing/2014/main" id="{A7200646-43E4-8226-5080-305D7D36F076}"/>
+            </a:ext>
+          </a:extLst>
+        </p:cNvPr>
         <p:cNvGrpSpPr/>
         <p:nvPr/>
       </p:nvGrpSpPr>
@@ -4730,7 +5403,13 @@
       </p:grpSpPr>
       <p:sp>
         <p:nvSpPr>
-          <p:cNvPr id="5" name="內容版面配置區 4"/>
+          <p:cNvPr id="5" name="內容版面配置區 4">
+            <a:extLst>
+              <a:ext uri="{FF2B5EF4-FFF2-40B4-BE49-F238E27FC236}">
+                <a16:creationId xmlns:a16="http://schemas.microsoft.com/office/drawing/2014/main" id="{D390A926-3B52-4C1E-E5CC-B32095821338}"/>
+              </a:ext>
+            </a:extLst>
+          </p:cNvPr>
           <p:cNvSpPr>
             <a:spLocks noGrp="1"/>
           </p:cNvSpPr>
@@ -4740,197 +5419,245 @@
         </p:nvSpPr>
         <p:spPr>
           <a:xfrm>
-            <a:off x="0" y="242902"/>
-            <a:ext cx="9144000" cy="5257800"/>
+            <a:off x="0" y="2084851"/>
+            <a:ext cx="12192000" cy="2404863"/>
           </a:xfrm>
         </p:spPr>
         <p:txBody>
-          <a:bodyPr>
+          <a:bodyPr anchor="ctr">
             <a:normAutofit/>
           </a:bodyPr>
           <a:lstStyle/>
           <a:p>
-            <a:pPr algn="ctr">
+            <a:pPr marL="0" indent="0" algn="ctr">
               <a:buNone/>
             </a:pPr>
             <a:r>
-              <a:rPr lang="zh-TW" altLang="en-US" sz="5400" b="1" dirty="0" smtClean="0">
-                <a:solidFill>
-                  <a:srgbClr val="000066"/>
-                </a:solidFill>
-                <a:latin typeface="微軟正黑體" pitchFamily="34" charset="-120"/>
-                <a:ea typeface="微軟正黑體" pitchFamily="34" charset="-120"/>
+              <a:rPr lang="zh-TW" altLang="en-US" sz="6400" b="1" dirty="0">
+                <a:solidFill>
+                  <a:srgbClr val="660033"/>
+                </a:solidFill>
+                <a:latin typeface="Microsoft JhengHei" pitchFamily="34" charset="-120"/>
+                <a:ea typeface="Microsoft JhengHei" pitchFamily="34" charset="-120"/>
               </a:rPr>
-              <a:t>今同心往聖山</a:t>
-            </a:r>
-            <a:endParaRPr lang="en-US" altLang="zh-TW" sz="5400" b="1" dirty="0" smtClean="0">
-              <a:solidFill>
-                <a:srgbClr val="000066"/>
-              </a:solidFill>
-              <a:latin typeface="微軟正黑體" pitchFamily="34" charset="-120"/>
-              <a:ea typeface="微軟正黑體" pitchFamily="34" charset="-120"/>
-            </a:endParaRPr>
-          </a:p>
-          <a:p>
-            <a:pPr algn="ctr">
+              <a:t>但全能主所收兒女</a:t>
+            </a:r>
+          </a:p>
+          <a:p>
+            <a:pPr marL="0" indent="0" algn="ctr">
               <a:buNone/>
             </a:pPr>
             <a:r>
-              <a:rPr lang="zh-TW" altLang="en-US" sz="5400" b="1" dirty="0" smtClean="0">
-                <a:solidFill>
-                  <a:srgbClr val="000066"/>
-                </a:solidFill>
-                <a:latin typeface="微軟正黑體" pitchFamily="34" charset="-120"/>
-                <a:ea typeface="微軟正黑體" pitchFamily="34" charset="-120"/>
+              <a:rPr lang="zh-TW" altLang="en-US" sz="6400" b="1" dirty="0">
+                <a:solidFill>
+                  <a:srgbClr val="660033"/>
+                </a:solidFill>
+                <a:latin typeface="Microsoft JhengHei" pitchFamily="34" charset="-120"/>
+                <a:ea typeface="Microsoft JhengHei" pitchFamily="34" charset="-120"/>
               </a:rPr>
-              <a:t>就是那佳美之錫安</a:t>
-            </a:r>
-            <a:endParaRPr lang="en-US" altLang="zh-TW" sz="5400" b="1" dirty="0" smtClean="0">
-              <a:solidFill>
-                <a:srgbClr val="000066"/>
-              </a:solidFill>
-              <a:latin typeface="微軟正黑體" pitchFamily="34" charset="-120"/>
-              <a:ea typeface="微軟正黑體" pitchFamily="34" charset="-120"/>
-            </a:endParaRPr>
-          </a:p>
-          <a:p>
-            <a:pPr algn="ctr">
-              <a:buNone/>
-            </a:pPr>
-            <a:r>
-              <a:rPr lang="zh-TW" altLang="en-US" sz="5400" b="1" dirty="0" smtClean="0">
-                <a:solidFill>
-                  <a:srgbClr val="000066"/>
-                </a:solidFill>
-                <a:latin typeface="微軟正黑體" pitchFamily="34" charset="-120"/>
-                <a:ea typeface="微軟正黑體" pitchFamily="34" charset="-120"/>
-              </a:rPr>
-              <a:t>大家齊步奔往聖山</a:t>
-            </a:r>
-            <a:endParaRPr lang="en-US" altLang="zh-TW" sz="5400" b="1" dirty="0" smtClean="0">
-              <a:solidFill>
-                <a:srgbClr val="000066"/>
-              </a:solidFill>
-              <a:latin typeface="微軟正黑體" pitchFamily="34" charset="-120"/>
-              <a:ea typeface="微軟正黑體" pitchFamily="34" charset="-120"/>
-            </a:endParaRPr>
-          </a:p>
-          <a:p>
-            <a:pPr algn="ctr">
-              <a:buNone/>
-            </a:pPr>
-            <a:r>
-              <a:rPr lang="zh-TW" altLang="en-US" sz="5400" b="1" dirty="0" smtClean="0">
-                <a:solidFill>
-                  <a:srgbClr val="000066"/>
-                </a:solidFill>
-                <a:latin typeface="微軟正黑體" pitchFamily="34" charset="-120"/>
-                <a:ea typeface="微軟正黑體" pitchFamily="34" charset="-120"/>
-              </a:rPr>
-              <a:t>仰望那佳美之聖城</a:t>
-            </a:r>
-            <a:endParaRPr lang="zh-TW" altLang="en-US" sz="5400" b="1" dirty="0">
-              <a:solidFill>
-                <a:srgbClr val="000066"/>
-              </a:solidFill>
-              <a:latin typeface="微軟正黑體" pitchFamily="34" charset="-120"/>
-              <a:ea typeface="微軟正黑體" pitchFamily="34" charset="-120"/>
-            </a:endParaRPr>
-          </a:p>
-        </p:txBody>
-      </p:sp>
-      <p:sp>
-        <p:nvSpPr>
-          <p:cNvPr id="6" name="標題 3"/>
-          <p:cNvSpPr txBox="1">
-            <a:spLocks/>
-          </p:cNvSpPr>
+              <a:t>但全能主所收兒女</a:t>
+            </a:r>
+          </a:p>
+        </p:txBody>
+      </p:sp>
+      <p:sp>
+        <p:nvSpPr>
+          <p:cNvPr id="3" name="TextBox 2">
+            <a:extLst>
+              <a:ext uri="{FF2B5EF4-FFF2-40B4-BE49-F238E27FC236}">
+                <a16:creationId xmlns:a16="http://schemas.microsoft.com/office/drawing/2014/main" id="{3828C50D-8497-309A-E76D-559FA90038DD}"/>
+              </a:ext>
+            </a:extLst>
+          </p:cNvPr>
+          <p:cNvSpPr txBox="1"/>
           <p:nvPr/>
         </p:nvSpPr>
         <p:spPr>
           <a:xfrm>
-            <a:off x="0" y="6429396"/>
-            <a:ext cx="1357290" cy="428604"/>
+            <a:off x="0" y="5061182"/>
+            <a:ext cx="12192000" cy="646331"/>
           </a:xfrm>
           <a:prstGeom prst="rect">
             <a:avLst/>
           </a:prstGeom>
+          <a:noFill/>
         </p:spPr>
         <p:txBody>
-          <a:bodyPr vert="horz" lIns="91440" tIns="45720" rIns="91440" bIns="45720" rtlCol="0" anchor="ctr">
+          <a:bodyPr wrap="square" rtlCol="0">
+            <a:spAutoFit/>
+          </a:bodyPr>
+          <a:lstStyle/>
+          <a:p>
+            <a:pPr algn="ctr"/>
+            <a:r>
+              <a:rPr lang="en-US" sz="3600" b="1" dirty="0">
+                <a:solidFill>
+                  <a:srgbClr val="660033"/>
+                </a:solidFill>
+              </a:rPr>
+              <a:t>( 2 / 4 )</a:t>
+            </a:r>
+            <a:endParaRPr lang="vi-VN" sz="3600" b="1" dirty="0">
+              <a:solidFill>
+                <a:srgbClr val="660033"/>
+              </a:solidFill>
+            </a:endParaRPr>
+          </a:p>
+        </p:txBody>
+      </p:sp>
+    </p:spTree>
+    <p:extLst>
+      <p:ext uri="{BB962C8B-B14F-4D97-AF65-F5344CB8AC3E}">
+        <p14:creationId xmlns:p14="http://schemas.microsoft.com/office/powerpoint/2010/main" val="1145593853"/>
+      </p:ext>
+    </p:extLst>
+  </p:cSld>
+  <p:clrMapOvr>
+    <a:masterClrMapping/>
+  </p:clrMapOvr>
+</p:sld>
+</file>
+
+<file path=ppt/slides/slide9.xml><?xml version="1.0" encoding="utf-8"?>
+<p:sld xmlns:a="http://schemas.openxmlformats.org/drawingml/2006/main" xmlns:r="http://schemas.openxmlformats.org/officeDocument/2006/relationships" xmlns:p="http://schemas.openxmlformats.org/presentationml/2006/main">
+  <p:cSld>
+    <p:spTree>
+      <p:nvGrpSpPr>
+        <p:cNvPr id="1" name="">
+          <a:extLst>
+            <a:ext uri="{FF2B5EF4-FFF2-40B4-BE49-F238E27FC236}">
+              <a16:creationId xmlns:a16="http://schemas.microsoft.com/office/drawing/2014/main" id="{93328B8B-2291-7F1A-6263-92A94FD9120D}"/>
+            </a:ext>
+          </a:extLst>
+        </p:cNvPr>
+        <p:cNvGrpSpPr/>
+        <p:nvPr/>
+      </p:nvGrpSpPr>
+      <p:grpSpPr>
+        <a:xfrm>
+          <a:off x="0" y="0"/>
+          <a:ext cx="0" cy="0"/>
+          <a:chOff x="0" y="0"/>
+          <a:chExt cx="0" cy="0"/>
+        </a:xfrm>
+      </p:grpSpPr>
+      <p:sp>
+        <p:nvSpPr>
+          <p:cNvPr id="5" name="內容版面配置區 4">
+            <a:extLst>
+              <a:ext uri="{FF2B5EF4-FFF2-40B4-BE49-F238E27FC236}">
+                <a16:creationId xmlns:a16="http://schemas.microsoft.com/office/drawing/2014/main" id="{A6937A32-F048-549A-E122-B007BB65FD90}"/>
+              </a:ext>
+            </a:extLst>
+          </p:cNvPr>
+          <p:cNvSpPr>
+            <a:spLocks noGrp="1"/>
+          </p:cNvSpPr>
+          <p:nvPr>
+            <p:ph idx="1"/>
+          </p:nvPr>
+        </p:nvSpPr>
+        <p:spPr>
+          <a:xfrm>
+            <a:off x="0" y="2084851"/>
+            <a:ext cx="12192000" cy="2404863"/>
+          </a:xfrm>
+        </p:spPr>
+        <p:txBody>
+          <a:bodyPr anchor="ctr">
             <a:normAutofit/>
           </a:bodyPr>
           <a:lstStyle/>
           <a:p>
-            <a:pPr marL="0" marR="0" lvl="0" indent="0" algn="ctr" defTabSz="914400" rtl="0" eaLnBrk="1" fontAlgn="auto" latinLnBrk="0" hangingPunct="1">
-              <a:lnSpc>
-                <a:spcPct val="100000"/>
-              </a:lnSpc>
-              <a:spcBef>
-                <a:spcPct val="0"/>
-              </a:spcBef>
-              <a:spcAft>
-                <a:spcPts val="0"/>
-              </a:spcAft>
-              <a:buClrTx/>
-              <a:buSzTx/>
-              <a:buFontTx/>
-              <a:buNone/>
-              <a:tabLst/>
-              <a:defRPr/>
+            <a:pPr marL="0" indent="0" algn="ctr">
+              <a:buNone/>
             </a:pPr>
             <a:r>
-              <a:rPr kumimoji="0" lang="zh-TW" altLang="en-US" sz="1500" b="1" i="0" u="none" strike="noStrike" kern="1200" cap="none" spc="0" normalizeH="0" baseline="0" noProof="0" dirty="0" smtClean="0">
-                <a:ln>
-                  <a:noFill/>
-                </a:ln>
-                <a:solidFill>
-                  <a:srgbClr val="000066"/>
-                </a:solidFill>
-                <a:effectLst/>
-                <a:uLnTx/>
-                <a:uFillTx/>
-                <a:latin typeface="微軟正黑體" pitchFamily="34" charset="-120"/>
-                <a:ea typeface="微軟正黑體" pitchFamily="34" charset="-120"/>
-                <a:cs typeface="+mj-cs"/>
+              <a:rPr lang="zh-TW" altLang="en-US" sz="6400" b="1" dirty="0">
+                <a:solidFill>
+                  <a:srgbClr val="660033"/>
+                </a:solidFill>
+                <a:latin typeface="Microsoft JhengHei" pitchFamily="34" charset="-120"/>
+                <a:ea typeface="Microsoft JhengHei" pitchFamily="34" charset="-120"/>
               </a:rPr>
-              <a:t>往天行走</a:t>
-            </a:r>
-            <a:r>
-              <a:rPr kumimoji="0" lang="en-US" altLang="zh-CN" sz="1500" b="1" i="0" u="none" strike="noStrike" kern="1200" cap="none" spc="0" normalizeH="0" baseline="0" noProof="0" dirty="0" smtClean="0">
-                <a:ln>
-                  <a:noFill/>
-                </a:ln>
-                <a:solidFill>
-                  <a:srgbClr val="000066"/>
-                </a:solidFill>
-                <a:effectLst/>
-                <a:uLnTx/>
-                <a:uFillTx/>
-                <a:latin typeface="微軟正黑體" pitchFamily="34" charset="-120"/>
-                <a:ea typeface="微軟正黑體" pitchFamily="34" charset="-120"/>
-                <a:cs typeface="+mj-cs"/>
+              <a:t>總要歡然讚美</a:t>
+            </a:r>
+            <a:endParaRPr lang="en-US" altLang="zh-TW" sz="6400" b="1" dirty="0">
+              <a:solidFill>
+                <a:srgbClr val="660033"/>
+              </a:solidFill>
+              <a:latin typeface="Microsoft JhengHei" pitchFamily="34" charset="-120"/>
+              <a:ea typeface="Microsoft JhengHei" pitchFamily="34" charset="-120"/>
+            </a:endParaRPr>
+          </a:p>
+          <a:p>
+            <a:pPr marL="0" indent="0" algn="ctr">
+              <a:buNone/>
+            </a:pPr>
+            <a:r>
+              <a:rPr lang="zh-TW" altLang="en-US" sz="6400" b="1" dirty="0">
+                <a:solidFill>
+                  <a:srgbClr val="660033"/>
+                </a:solidFill>
+                <a:latin typeface="Microsoft JhengHei" pitchFamily="34" charset="-120"/>
+                <a:ea typeface="Microsoft JhengHei" pitchFamily="34" charset="-120"/>
               </a:rPr>
-              <a:t>8/8</a:t>
-            </a:r>
-            <a:endParaRPr kumimoji="0" lang="zh-TW" altLang="en-US" sz="1500" b="0" i="0" u="none" strike="noStrike" kern="1200" cap="none" spc="0" normalizeH="0" baseline="0" noProof="0" dirty="0">
-              <a:ln>
-                <a:noFill/>
-              </a:ln>
+              <a:t>總要歡然讚美</a:t>
+            </a:r>
+          </a:p>
+        </p:txBody>
+      </p:sp>
+      <p:sp>
+        <p:nvSpPr>
+          <p:cNvPr id="3" name="TextBox 2">
+            <a:extLst>
+              <a:ext uri="{FF2B5EF4-FFF2-40B4-BE49-F238E27FC236}">
+                <a16:creationId xmlns:a16="http://schemas.microsoft.com/office/drawing/2014/main" id="{38336CCE-FD4D-4361-8031-390ABA240647}"/>
+              </a:ext>
+            </a:extLst>
+          </p:cNvPr>
+          <p:cNvSpPr txBox="1"/>
+          <p:nvPr/>
+        </p:nvSpPr>
+        <p:spPr>
+          <a:xfrm>
+            <a:off x="0" y="5061182"/>
+            <a:ext cx="12192000" cy="646331"/>
+          </a:xfrm>
+          <a:prstGeom prst="rect">
+            <a:avLst/>
+          </a:prstGeom>
+          <a:noFill/>
+        </p:spPr>
+        <p:txBody>
+          <a:bodyPr wrap="square" rtlCol="0">
+            <a:spAutoFit/>
+          </a:bodyPr>
+          <a:lstStyle/>
+          <a:p>
+            <a:pPr algn="ctr"/>
+            <a:r>
+              <a:rPr lang="en-US" sz="3600" b="1" dirty="0">
+                <a:solidFill>
+                  <a:srgbClr val="660033"/>
+                </a:solidFill>
+              </a:rPr>
+              <a:t>( 2 / 4 )</a:t>
+            </a:r>
+            <a:endParaRPr lang="vi-VN" sz="3600" b="1" dirty="0">
               <a:solidFill>
-                <a:srgbClr val="000066"/>
+                <a:srgbClr val="660033"/>
               </a:solidFill>
-              <a:effectLst/>
-              <a:uLnTx/>
-              <a:uFillTx/>
-              <a:latin typeface="微軟正黑體" pitchFamily="34" charset="-120"/>
-              <a:ea typeface="微軟正黑體" pitchFamily="34" charset="-120"/>
-              <a:cs typeface="+mj-cs"/>
             </a:endParaRPr>
           </a:p>
         </p:txBody>
       </p:sp>
     </p:spTree>
+    <p:extLst>
+      <p:ext uri="{BB962C8B-B14F-4D97-AF65-F5344CB8AC3E}">
+        <p14:creationId xmlns:p14="http://schemas.microsoft.com/office/powerpoint/2010/main" val="3397954068"/>
+      </p:ext>
+    </p:extLst>
   </p:cSld>
   <p:clrMapOvr>
     <a:masterClrMapping/>
